--- a/Wealth_Compass_Presentation.pptx
+++ b/Wealth_Compass_Presentation.pptx
@@ -5,22 +5,23 @@
     <p:sldMasterId id="2147483648" r:id="rId1"/>
   </p:sldMasterIdLst>
   <p:notesMasterIdLst>
-    <p:notesMasterId r:id="rId15"/>
+    <p:notesMasterId r:id="rId16"/>
   </p:notesMasterIdLst>
   <p:sldIdLst>
     <p:sldId id="268" r:id="rId2"/>
-    <p:sldId id="257" r:id="rId3"/>
-    <p:sldId id="258" r:id="rId4"/>
-    <p:sldId id="259" r:id="rId5"/>
-    <p:sldId id="260" r:id="rId6"/>
-    <p:sldId id="261" r:id="rId7"/>
-    <p:sldId id="262" r:id="rId8"/>
-    <p:sldId id="263" r:id="rId9"/>
-    <p:sldId id="267" r:id="rId10"/>
-    <p:sldId id="264" r:id="rId11"/>
-    <p:sldId id="256" r:id="rId12"/>
-    <p:sldId id="265" r:id="rId13"/>
-    <p:sldId id="266" r:id="rId14"/>
+    <p:sldId id="269" r:id="rId3"/>
+    <p:sldId id="257" r:id="rId4"/>
+    <p:sldId id="258" r:id="rId5"/>
+    <p:sldId id="259" r:id="rId6"/>
+    <p:sldId id="260" r:id="rId7"/>
+    <p:sldId id="261" r:id="rId8"/>
+    <p:sldId id="262" r:id="rId9"/>
+    <p:sldId id="263" r:id="rId10"/>
+    <p:sldId id="267" r:id="rId11"/>
+    <p:sldId id="264" r:id="rId12"/>
+    <p:sldId id="256" r:id="rId13"/>
+    <p:sldId id="265" r:id="rId14"/>
+    <p:sldId id="266" r:id="rId15"/>
   </p:sldIdLst>
   <p:sldSz cx="12192000" cy="6858000"/>
   <p:notesSz cx="6858000" cy="12192000"/>
@@ -540,71 +541,11 @@
           <a:bodyPr/>
           <a:lstStyle/>
           <a:p>
-            <a:pPr marL="0" marR="0" lvl="0" indent="0" algn="l" defTabSz="914400" rtl="0" eaLnBrk="1" fontAlgn="auto" latinLnBrk="0" hangingPunct="1">
-              <a:lnSpc>
-                <a:spcPct val="100000"/>
-              </a:lnSpc>
-              <a:spcBef>
-                <a:spcPts val="0"/>
-              </a:spcBef>
-              <a:spcAft>
-                <a:spcPts val="0"/>
-              </a:spcAft>
-              <a:buClrTx/>
-              <a:buSzTx/>
-              <a:buFontTx/>
-              <a:buNone/>
-              <a:tabLst/>
-              <a:defRPr/>
-            </a:pPr>
             <a:fld id="{F7021451-1387-4CA6-816F-3879F97B5CBC}" type="slidenum">
-              <a:rPr kumimoji="0" lang="en-US" sz="1800" b="0" i="0" u="none" strike="noStrike" kern="1200" cap="none" spc="0" normalizeH="0" baseline="0" noProof="0">
-                <a:ln>
-                  <a:noFill/>
-                </a:ln>
-                <a:solidFill>
-                  <a:prstClr val="black"/>
-                </a:solidFill>
-                <a:effectLst/>
-                <a:uLnTx/>
-                <a:uFillTx/>
-                <a:latin typeface="Calibri" panose="020F0502020204030204"/>
-                <a:ea typeface="+mn-ea"/>
-                <a:cs typeface="+mn-cs"/>
-              </a:rPr>
-              <a:pPr marL="0" marR="0" lvl="0" indent="0" algn="l" defTabSz="914400" rtl="0" eaLnBrk="1" fontAlgn="auto" latinLnBrk="0" hangingPunct="1">
-                <a:lnSpc>
-                  <a:spcPct val="100000"/>
-                </a:lnSpc>
-                <a:spcBef>
-                  <a:spcPts val="0"/>
-                </a:spcBef>
-                <a:spcAft>
-                  <a:spcPts val="0"/>
-                </a:spcAft>
-                <a:buClrTx/>
-                <a:buSzTx/>
-                <a:buFontTx/>
-                <a:buNone/>
-                <a:tabLst/>
-                <a:defRPr/>
-              </a:pPr>
+              <a:rPr lang="en-US"/>
               <a:t>11</a:t>
             </a:fld>
-            <a:endParaRPr kumimoji="0" lang="en-US" sz="1800" b="0" i="0" u="none" strike="noStrike" kern="1200" cap="none" spc="0" normalizeH="0" baseline="0" noProof="0">
-              <a:ln>
-                <a:noFill/>
-              </a:ln>
-              <a:solidFill>
-                <a:prstClr val="black"/>
-              </a:solidFill>
-              <a:effectLst/>
-              <a:uLnTx/>
-              <a:uFillTx/>
-              <a:latin typeface="Calibri" panose="020F0502020204030204"/>
-              <a:ea typeface="+mn-ea"/>
-              <a:cs typeface="+mn-cs"/>
-            </a:endParaRPr>
+            <a:endParaRPr lang="en-US"/>
           </a:p>
         </p:txBody>
       </p:sp>
@@ -684,11 +625,71 @@
           <a:bodyPr/>
           <a:lstStyle/>
           <a:p>
+            <a:pPr marL="0" marR="0" lvl="0" indent="0" algn="l" defTabSz="914400" rtl="0" eaLnBrk="1" fontAlgn="auto" latinLnBrk="0" hangingPunct="1">
+              <a:lnSpc>
+                <a:spcPct val="100000"/>
+              </a:lnSpc>
+              <a:spcBef>
+                <a:spcPts val="0"/>
+              </a:spcBef>
+              <a:spcAft>
+                <a:spcPts val="0"/>
+              </a:spcAft>
+              <a:buClrTx/>
+              <a:buSzTx/>
+              <a:buFontTx/>
+              <a:buNone/>
+              <a:tabLst/>
+              <a:defRPr/>
+            </a:pPr>
             <a:fld id="{F7021451-1387-4CA6-816F-3879F97B5CBC}" type="slidenum">
-              <a:rPr lang="en-US"/>
+              <a:rPr kumimoji="0" lang="en-US" sz="1800" b="0" i="0" u="none" strike="noStrike" kern="1200" cap="none" spc="0" normalizeH="0" baseline="0" noProof="0">
+                <a:ln>
+                  <a:noFill/>
+                </a:ln>
+                <a:solidFill>
+                  <a:prstClr val="black"/>
+                </a:solidFill>
+                <a:effectLst/>
+                <a:uLnTx/>
+                <a:uFillTx/>
+                <a:latin typeface="Calibri" panose="020F0502020204030204"/>
+                <a:ea typeface="+mn-ea"/>
+                <a:cs typeface="+mn-cs"/>
+              </a:rPr>
+              <a:pPr marL="0" marR="0" lvl="0" indent="0" algn="l" defTabSz="914400" rtl="0" eaLnBrk="1" fontAlgn="auto" latinLnBrk="0" hangingPunct="1">
+                <a:lnSpc>
+                  <a:spcPct val="100000"/>
+                </a:lnSpc>
+                <a:spcBef>
+                  <a:spcPts val="0"/>
+                </a:spcBef>
+                <a:spcAft>
+                  <a:spcPts val="0"/>
+                </a:spcAft>
+                <a:buClrTx/>
+                <a:buSzTx/>
+                <a:buFontTx/>
+                <a:buNone/>
+                <a:tabLst/>
+                <a:defRPr/>
+              </a:pPr>
               <a:t>12</a:t>
             </a:fld>
-            <a:endParaRPr lang="en-US"/>
+            <a:endParaRPr kumimoji="0" lang="en-US" sz="1800" b="0" i="0" u="none" strike="noStrike" kern="1200" cap="none" spc="0" normalizeH="0" baseline="0" noProof="0">
+              <a:ln>
+                <a:noFill/>
+              </a:ln>
+              <a:solidFill>
+                <a:prstClr val="black"/>
+              </a:solidFill>
+              <a:effectLst/>
+              <a:uLnTx/>
+              <a:uFillTx/>
+              <a:latin typeface="Calibri" panose="020F0502020204030204"/>
+              <a:ea typeface="+mn-ea"/>
+              <a:cs typeface="+mn-cs"/>
+            </a:endParaRPr>
           </a:p>
         </p:txBody>
       </p:sp>
@@ -789,7 +790,7 @@
 </p:notes>
 </file>
 
-<file path=ppt/notesSlides/notesSlide2.xml><?xml version="1.0" encoding="utf-8"?>
+<file path=ppt/notesSlides/notesSlide14.xml><?xml version="1.0" encoding="utf-8"?>
 <p:notes xmlns:a="http://schemas.openxmlformats.org/drawingml/2006/main" xmlns:r="http://schemas.openxmlformats.org/officeDocument/2006/relationships" xmlns:p="http://schemas.openxmlformats.org/presentationml/2006/main">
   <p:cSld>
     <p:spTree>
@@ -854,7 +855,7 @@
           <a:p>
             <a:fld id="{F7021451-1387-4CA6-816F-3879F97B5CBC}" type="slidenum">
               <a:rPr lang="en-US"/>
-              <a:t>2</a:t>
+              <a:t>14</a:t>
             </a:fld>
             <a:endParaRPr lang="en-US"/>
           </a:p>
@@ -864,6 +865,174 @@
     <p:extLst>
       <p:ext uri="{BB962C8B-B14F-4D97-AF65-F5344CB8AC3E}">
         <p14:creationId xmlns:p14="http://schemas.microsoft.com/office/powerpoint/2010/main" val="1024086991"/>
+      </p:ext>
+    </p:extLst>
+  </p:cSld>
+  <p:clrMapOvr>
+    <a:masterClrMapping/>
+  </p:clrMapOvr>
+</p:notes>
+</file>
+
+<file path=ppt/notesSlides/notesSlide2.xml><?xml version="1.0" encoding="utf-8"?>
+<p:notes xmlns:a="http://schemas.openxmlformats.org/drawingml/2006/main" xmlns:r="http://schemas.openxmlformats.org/officeDocument/2006/relationships" xmlns:p="http://schemas.openxmlformats.org/presentationml/2006/main">
+  <p:cSld>
+    <p:spTree>
+      <p:nvGrpSpPr>
+        <p:cNvPr id="1" name="">
+          <a:extLst>
+            <a:ext uri="{FF2B5EF4-FFF2-40B4-BE49-F238E27FC236}">
+              <a16:creationId xmlns:a16="http://schemas.microsoft.com/office/drawing/2014/main" id="{D0D96955-68E9-2D4E-C180-01B4358A928E}"/>
+            </a:ext>
+          </a:extLst>
+        </p:cNvPr>
+        <p:cNvGrpSpPr/>
+        <p:nvPr/>
+      </p:nvGrpSpPr>
+      <p:grpSpPr>
+        <a:xfrm>
+          <a:off x="0" y="0"/>
+          <a:ext cx="0" cy="0"/>
+          <a:chOff x="0" y="0"/>
+          <a:chExt cx="0" cy="0"/>
+        </a:xfrm>
+      </p:grpSpPr>
+      <p:sp>
+        <p:nvSpPr>
+          <p:cNvPr id="2" name="Slide Image Placeholder 1">
+            <a:extLst>
+              <a:ext uri="{FF2B5EF4-FFF2-40B4-BE49-F238E27FC236}">
+                <a16:creationId xmlns:a16="http://schemas.microsoft.com/office/drawing/2014/main" id="{898FD4AB-ACE7-BF56-5A08-FDF8F2568D91}"/>
+              </a:ext>
+            </a:extLst>
+          </p:cNvPr>
+          <p:cNvSpPr>
+            <a:spLocks noGrp="1" noRot="1" noChangeAspect="1"/>
+          </p:cNvSpPr>
+          <p:nvPr>
+            <p:ph type="sldImg"/>
+          </p:nvPr>
+        </p:nvSpPr>
+        <p:spPr/>
+      </p:sp>
+      <p:sp>
+        <p:nvSpPr>
+          <p:cNvPr id="3" name="Notes Placeholder 2">
+            <a:extLst>
+              <a:ext uri="{FF2B5EF4-FFF2-40B4-BE49-F238E27FC236}">
+                <a16:creationId xmlns:a16="http://schemas.microsoft.com/office/drawing/2014/main" id="{2AE0FF5D-DE92-2EDD-1329-89F3657D776E}"/>
+              </a:ext>
+            </a:extLst>
+          </p:cNvPr>
+          <p:cNvSpPr>
+            <a:spLocks noGrp="1"/>
+          </p:cNvSpPr>
+          <p:nvPr>
+            <p:ph type="body" idx="1"/>
+          </p:nvPr>
+        </p:nvSpPr>
+        <p:spPr/>
+        <p:txBody>
+          <a:bodyPr/>
+          <a:lstStyle/>
+          <a:p>
+            <a:endParaRPr lang="en-US" dirty="0"/>
+          </a:p>
+        </p:txBody>
+      </p:sp>
+      <p:sp>
+        <p:nvSpPr>
+          <p:cNvPr id="4" name="Slide Number Placeholder 3">
+            <a:extLst>
+              <a:ext uri="{FF2B5EF4-FFF2-40B4-BE49-F238E27FC236}">
+                <a16:creationId xmlns:a16="http://schemas.microsoft.com/office/drawing/2014/main" id="{AEE81C4D-C55E-0D96-C627-373ECE01C55E}"/>
+              </a:ext>
+            </a:extLst>
+          </p:cNvPr>
+          <p:cNvSpPr>
+            <a:spLocks noGrp="1"/>
+          </p:cNvSpPr>
+          <p:nvPr>
+            <p:ph type="sldNum" sz="quarter" idx="10"/>
+          </p:nvPr>
+        </p:nvSpPr>
+        <p:spPr/>
+        <p:txBody>
+          <a:bodyPr/>
+          <a:lstStyle/>
+          <a:p>
+            <a:pPr marL="0" marR="0" lvl="0" indent="0" algn="l" defTabSz="914400" rtl="0" eaLnBrk="1" fontAlgn="auto" latinLnBrk="0" hangingPunct="1">
+              <a:lnSpc>
+                <a:spcPct val="100000"/>
+              </a:lnSpc>
+              <a:spcBef>
+                <a:spcPts val="0"/>
+              </a:spcBef>
+              <a:spcAft>
+                <a:spcPts val="0"/>
+              </a:spcAft>
+              <a:buClrTx/>
+              <a:buSzTx/>
+              <a:buFontTx/>
+              <a:buNone/>
+              <a:tabLst/>
+              <a:defRPr/>
+            </a:pPr>
+            <a:fld id="{F7021451-1387-4CA6-816F-3879F97B5CBC}" type="slidenum">
+              <a:rPr kumimoji="0" lang="en-US" sz="1800" b="0" i="0" u="none" strike="noStrike" kern="1200" cap="none" spc="0" normalizeH="0" baseline="0" noProof="0">
+                <a:ln>
+                  <a:noFill/>
+                </a:ln>
+                <a:solidFill>
+                  <a:prstClr val="black"/>
+                </a:solidFill>
+                <a:effectLst/>
+                <a:uLnTx/>
+                <a:uFillTx/>
+                <a:latin typeface="Calibri" panose="020F0502020204030204"/>
+                <a:ea typeface="+mn-ea"/>
+                <a:cs typeface="+mn-cs"/>
+              </a:rPr>
+              <a:pPr marL="0" marR="0" lvl="0" indent="0" algn="l" defTabSz="914400" rtl="0" eaLnBrk="1" fontAlgn="auto" latinLnBrk="0" hangingPunct="1">
+                <a:lnSpc>
+                  <a:spcPct val="100000"/>
+                </a:lnSpc>
+                <a:spcBef>
+                  <a:spcPts val="0"/>
+                </a:spcBef>
+                <a:spcAft>
+                  <a:spcPts val="0"/>
+                </a:spcAft>
+                <a:buClrTx/>
+                <a:buSzTx/>
+                <a:buFontTx/>
+                <a:buNone/>
+                <a:tabLst/>
+                <a:defRPr/>
+              </a:pPr>
+              <a:t>2</a:t>
+            </a:fld>
+            <a:endParaRPr kumimoji="0" lang="en-US" sz="1800" b="0" i="0" u="none" strike="noStrike" kern="1200" cap="none" spc="0" normalizeH="0" baseline="0" noProof="0">
+              <a:ln>
+                <a:noFill/>
+              </a:ln>
+              <a:solidFill>
+                <a:prstClr val="black"/>
+              </a:solidFill>
+              <a:effectLst/>
+              <a:uLnTx/>
+              <a:uFillTx/>
+              <a:latin typeface="Calibri" panose="020F0502020204030204"/>
+              <a:ea typeface="+mn-ea"/>
+              <a:cs typeface="+mn-cs"/>
+            </a:endParaRPr>
+          </a:p>
+        </p:txBody>
+      </p:sp>
+    </p:spTree>
+    <p:extLst>
+      <p:ext uri="{BB962C8B-B14F-4D97-AF65-F5344CB8AC3E}">
+        <p14:creationId xmlns:p14="http://schemas.microsoft.com/office/powerpoint/2010/main" val="3899906809"/>
       </p:ext>
     </p:extLst>
   </p:cSld>
@@ -2227,7 +2396,7 @@
                   <a:noFill/>
                 </a:ln>
                 <a:solidFill>
-                  <a:srgbClr val="9AA6C9"/>
+                  <a:schemeClr val="bg1"/>
                 </a:solidFill>
                 <a:effectLst/>
                 <a:uLnTx/>
@@ -2263,7 +2432,7 @@
                   <a:noFill/>
                 </a:ln>
                 <a:solidFill>
-                  <a:srgbClr val="9AA6C9"/>
+                  <a:schemeClr val="bg1"/>
                 </a:solidFill>
                 <a:effectLst/>
                 <a:uLnTx/>
@@ -2299,7 +2468,7 @@
                   <a:noFill/>
                 </a:ln>
                 <a:solidFill>
-                  <a:srgbClr val="9AA6C9"/>
+                  <a:schemeClr val="bg1"/>
                 </a:solidFill>
                 <a:effectLst/>
                 <a:uLnTx/>
@@ -2315,7 +2484,7 @@
                 <a:noFill/>
               </a:ln>
               <a:solidFill>
-                <a:prstClr val="black"/>
+                <a:schemeClr val="bg1"/>
               </a:solidFill>
               <a:effectLst/>
               <a:uLnTx/>
@@ -2371,7 +2540,7 @@
                   <a:noFill/>
                 </a:ln>
                 <a:solidFill>
-                  <a:srgbClr val="8792B5"/>
+                  <a:schemeClr val="bg1"/>
                 </a:solidFill>
                 <a:effectLst/>
                 <a:uLnTx/>
@@ -2387,7 +2556,7 @@
                 <a:noFill/>
               </a:ln>
               <a:solidFill>
-                <a:prstClr val="black"/>
+                <a:schemeClr val="bg1"/>
               </a:solidFill>
               <a:effectLst/>
               <a:uLnTx/>
@@ -2399,6 +2568,36 @@
           </a:p>
         </p:txBody>
       </p:sp>
+      <p:pic>
+        <p:nvPicPr>
+          <p:cNvPr id="13" name="Picture 12">
+            <a:extLst>
+              <a:ext uri="{FF2B5EF4-FFF2-40B4-BE49-F238E27FC236}">
+                <a16:creationId xmlns:a16="http://schemas.microsoft.com/office/drawing/2014/main" id="{5F7A64CD-AA94-D3D6-4CF5-2CBE7127E09A}"/>
+              </a:ext>
+            </a:extLst>
+          </p:cNvPr>
+          <p:cNvPicPr>
+            <a:picLocks noChangeAspect="1"/>
+          </p:cNvPicPr>
+          <p:nvPr/>
+        </p:nvPicPr>
+        <p:blipFill>
+          <a:blip r:embed="rId3"/>
+          <a:stretch>
+            <a:fillRect/>
+          </a:stretch>
+        </p:blipFill>
+        <p:spPr>
+          <a:xfrm>
+            <a:off x="8795385" y="0"/>
+            <a:ext cx="3257550" cy="990600"/>
+          </a:xfrm>
+          <a:prstGeom prst="rect">
+            <a:avLst/>
+          </a:prstGeom>
+        </p:spPr>
+      </p:pic>
     </p:spTree>
   </p:cSld>
   <p:clrMapOvr>
@@ -2408,6 +2607,1381 @@
 </file>
 
 <file path=ppt/slides/slide10.xml><?xml version="1.0" encoding="utf-8"?>
+<p:sld xmlns:a="http://schemas.openxmlformats.org/drawingml/2006/main" xmlns:r="http://schemas.openxmlformats.org/officeDocument/2006/relationships" xmlns:p="http://schemas.openxmlformats.org/presentationml/2006/main">
+  <p:cSld>
+    <p:spTree>
+      <p:nvGrpSpPr>
+        <p:cNvPr id="1" name=""/>
+        <p:cNvGrpSpPr/>
+        <p:nvPr/>
+      </p:nvGrpSpPr>
+      <p:grpSpPr>
+        <a:xfrm>
+          <a:off x="0" y="0"/>
+          <a:ext cx="0" cy="0"/>
+          <a:chOff x="0" y="0"/>
+          <a:chExt cx="0" cy="0"/>
+        </a:xfrm>
+      </p:grpSpPr>
+      <p:sp>
+        <p:nvSpPr>
+          <p:cNvPr id="2" name="Text 0"/>
+          <p:cNvSpPr/>
+          <p:nvPr/>
+        </p:nvSpPr>
+        <p:spPr>
+          <a:xfrm>
+            <a:off x="548640" y="384048"/>
+            <a:ext cx="5486400" cy="292608"/>
+          </a:xfrm>
+          <a:prstGeom prst="rect">
+            <a:avLst/>
+          </a:prstGeom>
+          <a:noFill/>
+          <a:ln/>
+        </p:spPr>
+        <p:txBody>
+          <a:bodyPr wrap="square" lIns="0" tIns="0" rIns="0" bIns="0" rtlCol="0" anchor="ctr"/>
+          <a:lstStyle/>
+          <a:p>
+            <a:pPr marL="0" indent="0">
+              <a:buNone/>
+            </a:pPr>
+            <a:r>
+              <a:rPr lang="en-US" sz="1300" b="1" kern="0" spc="200" dirty="0">
+                <a:solidFill>
+                  <a:srgbClr val="D4A017"/>
+                </a:solidFill>
+                <a:latin typeface="Calibri" pitchFamily="34" charset="0"/>
+                <a:ea typeface="Calibri" pitchFamily="34" charset="-122"/>
+                <a:cs typeface="Calibri" pitchFamily="34" charset="-120"/>
+              </a:rPr>
+              <a:t>TECHNOLOGY</a:t>
+            </a:r>
+            <a:r>
+              <a:rPr lang="en-US" sz="1200" b="1" kern="0" spc="200" dirty="0">
+                <a:solidFill>
+                  <a:srgbClr val="00A896"/>
+                </a:solidFill>
+                <a:latin typeface="Calibri" pitchFamily="34" charset="0"/>
+                <a:ea typeface="Calibri" pitchFamily="34" charset="-122"/>
+                <a:cs typeface="Calibri" pitchFamily="34" charset="-120"/>
+              </a:rPr>
+              <a:t> </a:t>
+            </a:r>
+            <a:r>
+              <a:rPr lang="en-US" sz="1300" b="1" kern="0" spc="200" dirty="0">
+                <a:solidFill>
+                  <a:srgbClr val="D4A017"/>
+                </a:solidFill>
+                <a:latin typeface="Calibri" pitchFamily="34" charset="0"/>
+                <a:ea typeface="Calibri" pitchFamily="34" charset="-122"/>
+                <a:cs typeface="Calibri" pitchFamily="34" charset="-120"/>
+              </a:rPr>
+              <a:t>STACK</a:t>
+            </a:r>
+          </a:p>
+        </p:txBody>
+      </p:sp>
+      <p:sp>
+        <p:nvSpPr>
+          <p:cNvPr id="3" name="Text 1"/>
+          <p:cNvSpPr/>
+          <p:nvPr/>
+        </p:nvSpPr>
+        <p:spPr>
+          <a:xfrm>
+            <a:off x="548640" y="713232"/>
+            <a:ext cx="10789920" cy="594360"/>
+          </a:xfrm>
+          <a:prstGeom prst="rect">
+            <a:avLst/>
+          </a:prstGeom>
+          <a:noFill/>
+          <a:ln/>
+        </p:spPr>
+        <p:txBody>
+          <a:bodyPr wrap="square" lIns="0" tIns="0" rIns="0" bIns="0" rtlCol="0" anchor="ctr"/>
+          <a:lstStyle/>
+          <a:p>
+            <a:pPr marL="0" indent="0">
+              <a:buNone/>
+            </a:pPr>
+            <a:r>
+              <a:rPr lang="en-US" sz="2800" b="1" dirty="0">
+                <a:solidFill>
+                  <a:srgbClr val="1B2340"/>
+                </a:solidFill>
+                <a:latin typeface="Cambria" pitchFamily="34" charset="0"/>
+                <a:ea typeface="Cambria" pitchFamily="34" charset="-122"/>
+                <a:cs typeface="Cambria" pitchFamily="34" charset="-120"/>
+              </a:rPr>
+              <a:t>Technologies &amp; tools planned for the build</a:t>
+            </a:r>
+            <a:endParaRPr lang="en-US" sz="2800" dirty="0"/>
+          </a:p>
+        </p:txBody>
+      </p:sp>
+      <p:sp>
+        <p:nvSpPr>
+          <p:cNvPr id="4" name="Text 2"/>
+          <p:cNvSpPr/>
+          <p:nvPr/>
+        </p:nvSpPr>
+        <p:spPr>
+          <a:xfrm>
+            <a:off x="548640" y="1353312"/>
+            <a:ext cx="10607040" cy="365760"/>
+          </a:xfrm>
+          <a:prstGeom prst="rect">
+            <a:avLst/>
+          </a:prstGeom>
+          <a:noFill/>
+          <a:ln/>
+        </p:spPr>
+        <p:txBody>
+          <a:bodyPr wrap="square" lIns="0" tIns="0" rIns="0" bIns="0" rtlCol="0" anchor="ctr"/>
+          <a:lstStyle/>
+          <a:p>
+            <a:pPr marL="0" indent="0">
+              <a:buNone/>
+            </a:pPr>
+            <a:r>
+              <a:rPr lang="en-US" sz="1300" dirty="0">
+                <a:solidFill>
+                  <a:srgbClr val="5B6478"/>
+                </a:solidFill>
+                <a:latin typeface="Calibri" pitchFamily="34" charset="0"/>
+                <a:ea typeface="Calibri" pitchFamily="34" charset="-122"/>
+                <a:cs typeface="Calibri" pitchFamily="34" charset="-120"/>
+              </a:rPr>
+              <a:t>Turborepo monorepo pairing a NestJS modular monolith with a specialized Python quant microservice.</a:t>
+            </a:r>
+            <a:endParaRPr lang="en-US" sz="1300" dirty="0"/>
+          </a:p>
+        </p:txBody>
+      </p:sp>
+      <p:sp>
+        <p:nvSpPr>
+          <p:cNvPr id="5" name="Shape 3"/>
+          <p:cNvSpPr/>
+          <p:nvPr/>
+        </p:nvSpPr>
+        <p:spPr>
+          <a:xfrm>
+            <a:off x="548640" y="1965960"/>
+            <a:ext cx="3538728" cy="1078992"/>
+          </a:xfrm>
+          <a:prstGeom prst="rect">
+            <a:avLst/>
+          </a:prstGeom>
+          <a:solidFill>
+            <a:srgbClr val="F3F6FC"/>
+          </a:solidFill>
+          <a:ln w="12700">
+            <a:solidFill>
+              <a:srgbClr val="DCE3F2"/>
+            </a:solidFill>
+            <a:prstDash val="solid"/>
+          </a:ln>
+        </p:spPr>
+      </p:sp>
+      <p:sp>
+        <p:nvSpPr>
+          <p:cNvPr id="6" name="Shape 4"/>
+          <p:cNvSpPr/>
+          <p:nvPr/>
+        </p:nvSpPr>
+        <p:spPr>
+          <a:xfrm>
+            <a:off x="768096" y="2130552"/>
+            <a:ext cx="100584" cy="100584"/>
+          </a:xfrm>
+          <a:prstGeom prst="ellipse">
+            <a:avLst/>
+          </a:prstGeom>
+          <a:solidFill>
+            <a:srgbClr val="00A896"/>
+          </a:solidFill>
+          <a:ln/>
+        </p:spPr>
+      </p:sp>
+      <p:sp>
+        <p:nvSpPr>
+          <p:cNvPr id="7" name="Text 5"/>
+          <p:cNvSpPr/>
+          <p:nvPr/>
+        </p:nvSpPr>
+        <p:spPr>
+          <a:xfrm>
+            <a:off x="987552" y="2057400"/>
+            <a:ext cx="2898648" cy="292608"/>
+          </a:xfrm>
+          <a:prstGeom prst="rect">
+            <a:avLst/>
+          </a:prstGeom>
+          <a:noFill/>
+          <a:ln/>
+        </p:spPr>
+        <p:txBody>
+          <a:bodyPr wrap="square" lIns="0" tIns="0" rIns="0" bIns="0" rtlCol="0" anchor="ctr"/>
+          <a:lstStyle/>
+          <a:p>
+            <a:pPr marL="0" indent="0">
+              <a:buNone/>
+            </a:pPr>
+            <a:r>
+              <a:rPr lang="en-US" sz="1250" b="1" dirty="0">
+                <a:solidFill>
+                  <a:srgbClr val="1E2761"/>
+                </a:solidFill>
+                <a:latin typeface="Calibri" pitchFamily="34" charset="0"/>
+                <a:ea typeface="Calibri" pitchFamily="34" charset="-122"/>
+                <a:cs typeface="Calibri" pitchFamily="34" charset="-120"/>
+              </a:rPr>
+              <a:t>Monorepo</a:t>
+            </a:r>
+            <a:endParaRPr lang="en-US" sz="1250" dirty="0"/>
+          </a:p>
+        </p:txBody>
+      </p:sp>
+      <p:sp>
+        <p:nvSpPr>
+          <p:cNvPr id="8" name="Text 6"/>
+          <p:cNvSpPr/>
+          <p:nvPr/>
+        </p:nvSpPr>
+        <p:spPr>
+          <a:xfrm>
+            <a:off x="768096" y="2386584"/>
+            <a:ext cx="3127248" cy="576072"/>
+          </a:xfrm>
+          <a:prstGeom prst="rect">
+            <a:avLst/>
+          </a:prstGeom>
+          <a:noFill/>
+          <a:ln/>
+        </p:spPr>
+        <p:txBody>
+          <a:bodyPr wrap="square" lIns="0" tIns="0" rIns="0" bIns="0" rtlCol="0" anchor="t"/>
+          <a:lstStyle/>
+          <a:p>
+            <a:pPr marL="0" indent="0">
+              <a:lnSpc>
+                <a:spcPct val="120000"/>
+              </a:lnSpc>
+              <a:buNone/>
+            </a:pPr>
+            <a:r>
+              <a:rPr lang="en-US" sz="1020" dirty="0">
+                <a:solidFill>
+                  <a:srgbClr val="1B2340"/>
+                </a:solidFill>
+                <a:latin typeface="Calibri" pitchFamily="34" charset="0"/>
+                <a:ea typeface="Calibri" pitchFamily="34" charset="-122"/>
+                <a:cs typeface="Calibri" pitchFamily="34" charset="-120"/>
+              </a:rPr>
+              <a:t>Turborepo + pnpm</a:t>
+            </a:r>
+            <a:endParaRPr lang="en-US" sz="1020" dirty="0"/>
+          </a:p>
+        </p:txBody>
+      </p:sp>
+      <p:sp>
+        <p:nvSpPr>
+          <p:cNvPr id="9" name="Shape 7"/>
+          <p:cNvSpPr/>
+          <p:nvPr/>
+        </p:nvSpPr>
+        <p:spPr>
+          <a:xfrm>
+            <a:off x="4343400" y="1965960"/>
+            <a:ext cx="3538728" cy="1078992"/>
+          </a:xfrm>
+          <a:prstGeom prst="rect">
+            <a:avLst/>
+          </a:prstGeom>
+          <a:solidFill>
+            <a:srgbClr val="F3F6FC"/>
+          </a:solidFill>
+          <a:ln w="12700">
+            <a:solidFill>
+              <a:srgbClr val="DCE3F2"/>
+            </a:solidFill>
+            <a:prstDash val="solid"/>
+          </a:ln>
+        </p:spPr>
+      </p:sp>
+      <p:sp>
+        <p:nvSpPr>
+          <p:cNvPr id="10" name="Shape 8"/>
+          <p:cNvSpPr/>
+          <p:nvPr/>
+        </p:nvSpPr>
+        <p:spPr>
+          <a:xfrm>
+            <a:off x="4562856" y="2130552"/>
+            <a:ext cx="100584" cy="100584"/>
+          </a:xfrm>
+          <a:prstGeom prst="ellipse">
+            <a:avLst/>
+          </a:prstGeom>
+          <a:solidFill>
+            <a:srgbClr val="00A896"/>
+          </a:solidFill>
+          <a:ln/>
+        </p:spPr>
+      </p:sp>
+      <p:sp>
+        <p:nvSpPr>
+          <p:cNvPr id="11" name="Text 9"/>
+          <p:cNvSpPr/>
+          <p:nvPr/>
+        </p:nvSpPr>
+        <p:spPr>
+          <a:xfrm>
+            <a:off x="4782312" y="2057400"/>
+            <a:ext cx="2898648" cy="292608"/>
+          </a:xfrm>
+          <a:prstGeom prst="rect">
+            <a:avLst/>
+          </a:prstGeom>
+          <a:noFill/>
+          <a:ln/>
+        </p:spPr>
+        <p:txBody>
+          <a:bodyPr wrap="square" lIns="0" tIns="0" rIns="0" bIns="0" rtlCol="0" anchor="ctr"/>
+          <a:lstStyle/>
+          <a:p>
+            <a:pPr marL="0" indent="0">
+              <a:buNone/>
+            </a:pPr>
+            <a:r>
+              <a:rPr lang="en-US" sz="1250" b="1" dirty="0">
+                <a:solidFill>
+                  <a:srgbClr val="1E2761"/>
+                </a:solidFill>
+                <a:latin typeface="Calibri" pitchFamily="34" charset="0"/>
+                <a:ea typeface="Calibri" pitchFamily="34" charset="-122"/>
+                <a:cs typeface="Calibri" pitchFamily="34" charset="-120"/>
+              </a:rPr>
+              <a:t>Web Frontend</a:t>
+            </a:r>
+            <a:endParaRPr lang="en-US" sz="1250" dirty="0"/>
+          </a:p>
+        </p:txBody>
+      </p:sp>
+      <p:sp>
+        <p:nvSpPr>
+          <p:cNvPr id="12" name="Text 10"/>
+          <p:cNvSpPr/>
+          <p:nvPr/>
+        </p:nvSpPr>
+        <p:spPr>
+          <a:xfrm>
+            <a:off x="4562856" y="2386584"/>
+            <a:ext cx="3127248" cy="576072"/>
+          </a:xfrm>
+          <a:prstGeom prst="rect">
+            <a:avLst/>
+          </a:prstGeom>
+          <a:noFill/>
+          <a:ln/>
+        </p:spPr>
+        <p:txBody>
+          <a:bodyPr wrap="square" lIns="0" tIns="0" rIns="0" bIns="0" rtlCol="0" anchor="t"/>
+          <a:lstStyle/>
+          <a:p>
+            <a:pPr marL="0" indent="0">
+              <a:lnSpc>
+                <a:spcPct val="120000"/>
+              </a:lnSpc>
+              <a:buNone/>
+            </a:pPr>
+            <a:r>
+              <a:rPr lang="en-US" sz="1020" dirty="0">
+                <a:solidFill>
+                  <a:srgbClr val="1B2340"/>
+                </a:solidFill>
+                <a:latin typeface="Calibri" pitchFamily="34" charset="0"/>
+                <a:ea typeface="Calibri" pitchFamily="34" charset="-122"/>
+                <a:cs typeface="Calibri" pitchFamily="34" charset="-120"/>
+              </a:rPr>
+              <a:t>Next.js 14 (App Router), React 18, Tailwind CSS, Shadcn UI</a:t>
+            </a:r>
+            <a:endParaRPr lang="en-US" sz="1020" dirty="0"/>
+          </a:p>
+        </p:txBody>
+      </p:sp>
+      <p:sp>
+        <p:nvSpPr>
+          <p:cNvPr id="13" name="Shape 11"/>
+          <p:cNvSpPr/>
+          <p:nvPr/>
+        </p:nvSpPr>
+        <p:spPr>
+          <a:xfrm>
+            <a:off x="8138160" y="1965960"/>
+            <a:ext cx="3538728" cy="1078992"/>
+          </a:xfrm>
+          <a:prstGeom prst="rect">
+            <a:avLst/>
+          </a:prstGeom>
+          <a:solidFill>
+            <a:srgbClr val="F3F6FC"/>
+          </a:solidFill>
+          <a:ln w="12700">
+            <a:solidFill>
+              <a:srgbClr val="DCE3F2"/>
+            </a:solidFill>
+            <a:prstDash val="solid"/>
+          </a:ln>
+        </p:spPr>
+      </p:sp>
+      <p:sp>
+        <p:nvSpPr>
+          <p:cNvPr id="14" name="Shape 12"/>
+          <p:cNvSpPr/>
+          <p:nvPr/>
+        </p:nvSpPr>
+        <p:spPr>
+          <a:xfrm>
+            <a:off x="8357616" y="2130552"/>
+            <a:ext cx="100584" cy="100584"/>
+          </a:xfrm>
+          <a:prstGeom prst="ellipse">
+            <a:avLst/>
+          </a:prstGeom>
+          <a:solidFill>
+            <a:srgbClr val="00A896"/>
+          </a:solidFill>
+          <a:ln/>
+        </p:spPr>
+      </p:sp>
+      <p:sp>
+        <p:nvSpPr>
+          <p:cNvPr id="15" name="Text 13"/>
+          <p:cNvSpPr/>
+          <p:nvPr/>
+        </p:nvSpPr>
+        <p:spPr>
+          <a:xfrm>
+            <a:off x="8577072" y="2057400"/>
+            <a:ext cx="2898648" cy="292608"/>
+          </a:xfrm>
+          <a:prstGeom prst="rect">
+            <a:avLst/>
+          </a:prstGeom>
+          <a:noFill/>
+          <a:ln/>
+        </p:spPr>
+        <p:txBody>
+          <a:bodyPr wrap="square" lIns="0" tIns="0" rIns="0" bIns="0" rtlCol="0" anchor="ctr"/>
+          <a:lstStyle/>
+          <a:p>
+            <a:pPr marL="0" indent="0">
+              <a:buNone/>
+            </a:pPr>
+            <a:r>
+              <a:rPr lang="en-US" sz="1250" b="1" dirty="0">
+                <a:solidFill>
+                  <a:srgbClr val="1E2761"/>
+                </a:solidFill>
+                <a:latin typeface="Calibri" pitchFamily="34" charset="0"/>
+                <a:ea typeface="Calibri" pitchFamily="34" charset="-122"/>
+                <a:cs typeface="Calibri" pitchFamily="34" charset="-120"/>
+              </a:rPr>
+              <a:t>Mobile App</a:t>
+            </a:r>
+            <a:endParaRPr lang="en-US" sz="1250" dirty="0"/>
+          </a:p>
+        </p:txBody>
+      </p:sp>
+      <p:sp>
+        <p:nvSpPr>
+          <p:cNvPr id="16" name="Text 14"/>
+          <p:cNvSpPr/>
+          <p:nvPr/>
+        </p:nvSpPr>
+        <p:spPr>
+          <a:xfrm>
+            <a:off x="8357616" y="2386584"/>
+            <a:ext cx="3127248" cy="576072"/>
+          </a:xfrm>
+          <a:prstGeom prst="rect">
+            <a:avLst/>
+          </a:prstGeom>
+          <a:noFill/>
+          <a:ln/>
+        </p:spPr>
+        <p:txBody>
+          <a:bodyPr wrap="square" lIns="0" tIns="0" rIns="0" bIns="0" rtlCol="0" anchor="t"/>
+          <a:lstStyle/>
+          <a:p>
+            <a:pPr marL="0" indent="0">
+              <a:lnSpc>
+                <a:spcPct val="120000"/>
+              </a:lnSpc>
+              <a:buNone/>
+            </a:pPr>
+            <a:r>
+              <a:rPr lang="en-US" sz="1020" dirty="0">
+                <a:solidFill>
+                  <a:srgbClr val="1B2340"/>
+                </a:solidFill>
+                <a:latin typeface="Calibri" pitchFamily="34" charset="0"/>
+                <a:ea typeface="Calibri" pitchFamily="34" charset="-122"/>
+                <a:cs typeface="Calibri" pitchFamily="34" charset="-120"/>
+              </a:rPr>
+              <a:t>React Native + Expo, React Navigation</a:t>
+            </a:r>
+            <a:endParaRPr lang="en-US" sz="1020" dirty="0"/>
+          </a:p>
+        </p:txBody>
+      </p:sp>
+      <p:sp>
+        <p:nvSpPr>
+          <p:cNvPr id="17" name="Shape 15"/>
+          <p:cNvSpPr/>
+          <p:nvPr/>
+        </p:nvSpPr>
+        <p:spPr>
+          <a:xfrm>
+            <a:off x="548640" y="3264408"/>
+            <a:ext cx="3538728" cy="1078992"/>
+          </a:xfrm>
+          <a:prstGeom prst="rect">
+            <a:avLst/>
+          </a:prstGeom>
+          <a:solidFill>
+            <a:srgbClr val="F3F6FC"/>
+          </a:solidFill>
+          <a:ln w="12700">
+            <a:solidFill>
+              <a:srgbClr val="DCE3F2"/>
+            </a:solidFill>
+            <a:prstDash val="solid"/>
+          </a:ln>
+        </p:spPr>
+      </p:sp>
+      <p:sp>
+        <p:nvSpPr>
+          <p:cNvPr id="18" name="Shape 16"/>
+          <p:cNvSpPr/>
+          <p:nvPr/>
+        </p:nvSpPr>
+        <p:spPr>
+          <a:xfrm>
+            <a:off x="768096" y="3429000"/>
+            <a:ext cx="100584" cy="100584"/>
+          </a:xfrm>
+          <a:prstGeom prst="ellipse">
+            <a:avLst/>
+          </a:prstGeom>
+          <a:solidFill>
+            <a:srgbClr val="00A896"/>
+          </a:solidFill>
+          <a:ln/>
+        </p:spPr>
+      </p:sp>
+      <p:sp>
+        <p:nvSpPr>
+          <p:cNvPr id="19" name="Text 17"/>
+          <p:cNvSpPr/>
+          <p:nvPr/>
+        </p:nvSpPr>
+        <p:spPr>
+          <a:xfrm>
+            <a:off x="987552" y="3355848"/>
+            <a:ext cx="2898648" cy="292608"/>
+          </a:xfrm>
+          <a:prstGeom prst="rect">
+            <a:avLst/>
+          </a:prstGeom>
+          <a:noFill/>
+          <a:ln/>
+        </p:spPr>
+        <p:txBody>
+          <a:bodyPr wrap="square" lIns="0" tIns="0" rIns="0" bIns="0" rtlCol="0" anchor="ctr"/>
+          <a:lstStyle/>
+          <a:p>
+            <a:pPr marL="0" indent="0">
+              <a:buNone/>
+            </a:pPr>
+            <a:r>
+              <a:rPr lang="en-US" sz="1250" b="1" dirty="0">
+                <a:solidFill>
+                  <a:srgbClr val="1E2761"/>
+                </a:solidFill>
+                <a:latin typeface="Calibri" pitchFamily="34" charset="0"/>
+                <a:ea typeface="Calibri" pitchFamily="34" charset="-122"/>
+                <a:cs typeface="Calibri" pitchFamily="34" charset="-120"/>
+              </a:rPr>
+              <a:t>Backend API</a:t>
+            </a:r>
+            <a:endParaRPr lang="en-US" sz="1250" dirty="0"/>
+          </a:p>
+        </p:txBody>
+      </p:sp>
+      <p:sp>
+        <p:nvSpPr>
+          <p:cNvPr id="20" name="Text 18"/>
+          <p:cNvSpPr/>
+          <p:nvPr/>
+        </p:nvSpPr>
+        <p:spPr>
+          <a:xfrm>
+            <a:off x="768096" y="3685032"/>
+            <a:ext cx="3127248" cy="576072"/>
+          </a:xfrm>
+          <a:prstGeom prst="rect">
+            <a:avLst/>
+          </a:prstGeom>
+          <a:noFill/>
+          <a:ln/>
+        </p:spPr>
+        <p:txBody>
+          <a:bodyPr wrap="square" lIns="0" tIns="0" rIns="0" bIns="0" rtlCol="0" anchor="t"/>
+          <a:lstStyle/>
+          <a:p>
+            <a:pPr marL="0" indent="0">
+              <a:lnSpc>
+                <a:spcPct val="120000"/>
+              </a:lnSpc>
+              <a:buNone/>
+            </a:pPr>
+            <a:r>
+              <a:rPr lang="en-US" sz="1020" dirty="0">
+                <a:solidFill>
+                  <a:srgbClr val="1B2340"/>
+                </a:solidFill>
+                <a:latin typeface="Calibri" pitchFamily="34" charset="0"/>
+                <a:ea typeface="Calibri" pitchFamily="34" charset="-122"/>
+                <a:cs typeface="Calibri" pitchFamily="34" charset="-120"/>
+              </a:rPr>
+              <a:t>NestJS (Node.js) + TypeScript, OpenAPI/Swagger</a:t>
+            </a:r>
+            <a:endParaRPr lang="en-US" sz="1020" dirty="0"/>
+          </a:p>
+        </p:txBody>
+      </p:sp>
+      <p:sp>
+        <p:nvSpPr>
+          <p:cNvPr id="21" name="Shape 19"/>
+          <p:cNvSpPr/>
+          <p:nvPr/>
+        </p:nvSpPr>
+        <p:spPr>
+          <a:xfrm>
+            <a:off x="4343400" y="3264408"/>
+            <a:ext cx="3538728" cy="1078992"/>
+          </a:xfrm>
+          <a:prstGeom prst="rect">
+            <a:avLst/>
+          </a:prstGeom>
+          <a:solidFill>
+            <a:srgbClr val="F3F6FC"/>
+          </a:solidFill>
+          <a:ln w="12700">
+            <a:solidFill>
+              <a:srgbClr val="DCE3F2"/>
+            </a:solidFill>
+            <a:prstDash val="solid"/>
+          </a:ln>
+        </p:spPr>
+      </p:sp>
+      <p:sp>
+        <p:nvSpPr>
+          <p:cNvPr id="22" name="Shape 20"/>
+          <p:cNvSpPr/>
+          <p:nvPr/>
+        </p:nvSpPr>
+        <p:spPr>
+          <a:xfrm>
+            <a:off x="4562856" y="3429000"/>
+            <a:ext cx="100584" cy="100584"/>
+          </a:xfrm>
+          <a:prstGeom prst="ellipse">
+            <a:avLst/>
+          </a:prstGeom>
+          <a:solidFill>
+            <a:srgbClr val="00A896"/>
+          </a:solidFill>
+          <a:ln/>
+        </p:spPr>
+      </p:sp>
+      <p:sp>
+        <p:nvSpPr>
+          <p:cNvPr id="23" name="Text 21"/>
+          <p:cNvSpPr/>
+          <p:nvPr/>
+        </p:nvSpPr>
+        <p:spPr>
+          <a:xfrm>
+            <a:off x="4782312" y="3355848"/>
+            <a:ext cx="2898648" cy="292608"/>
+          </a:xfrm>
+          <a:prstGeom prst="rect">
+            <a:avLst/>
+          </a:prstGeom>
+          <a:noFill/>
+          <a:ln/>
+        </p:spPr>
+        <p:txBody>
+          <a:bodyPr wrap="square" lIns="0" tIns="0" rIns="0" bIns="0" rtlCol="0" anchor="ctr"/>
+          <a:lstStyle/>
+          <a:p>
+            <a:pPr marL="0" indent="0">
+              <a:buNone/>
+            </a:pPr>
+            <a:r>
+              <a:rPr lang="en-US" sz="1250" b="1" dirty="0">
+                <a:solidFill>
+                  <a:srgbClr val="1E2761"/>
+                </a:solidFill>
+                <a:latin typeface="Calibri" pitchFamily="34" charset="0"/>
+                <a:ea typeface="Calibri" pitchFamily="34" charset="-122"/>
+                <a:cs typeface="Calibri" pitchFamily="34" charset="-120"/>
+              </a:rPr>
+              <a:t>Quant Microservice</a:t>
+            </a:r>
+            <a:endParaRPr lang="en-US" sz="1250" dirty="0"/>
+          </a:p>
+        </p:txBody>
+      </p:sp>
+      <p:sp>
+        <p:nvSpPr>
+          <p:cNvPr id="24" name="Text 22"/>
+          <p:cNvSpPr/>
+          <p:nvPr/>
+        </p:nvSpPr>
+        <p:spPr>
+          <a:xfrm>
+            <a:off x="4562856" y="3685032"/>
+            <a:ext cx="3127248" cy="576072"/>
+          </a:xfrm>
+          <a:prstGeom prst="rect">
+            <a:avLst/>
+          </a:prstGeom>
+          <a:noFill/>
+          <a:ln/>
+        </p:spPr>
+        <p:txBody>
+          <a:bodyPr wrap="square" lIns="0" tIns="0" rIns="0" bIns="0" rtlCol="0" anchor="t"/>
+          <a:lstStyle/>
+          <a:p>
+            <a:pPr marL="0" indent="0">
+              <a:lnSpc>
+                <a:spcPct val="120000"/>
+              </a:lnSpc>
+              <a:buNone/>
+            </a:pPr>
+            <a:r>
+              <a:rPr lang="en-US" sz="1020" dirty="0">
+                <a:solidFill>
+                  <a:srgbClr val="1B2340"/>
+                </a:solidFill>
+                <a:latin typeface="Calibri" pitchFamily="34" charset="0"/>
+                <a:ea typeface="Calibri" pitchFamily="34" charset="-122"/>
+                <a:cs typeface="Calibri" pitchFamily="34" charset="-120"/>
+              </a:rPr>
+              <a:t>Python 3.11, FastAPI, NumPy, pandas, SciPy</a:t>
+            </a:r>
+            <a:endParaRPr lang="en-US" sz="1020" dirty="0"/>
+          </a:p>
+        </p:txBody>
+      </p:sp>
+      <p:sp>
+        <p:nvSpPr>
+          <p:cNvPr id="25" name="Shape 23"/>
+          <p:cNvSpPr/>
+          <p:nvPr/>
+        </p:nvSpPr>
+        <p:spPr>
+          <a:xfrm>
+            <a:off x="8138160" y="3264408"/>
+            <a:ext cx="3538728" cy="1078992"/>
+          </a:xfrm>
+          <a:prstGeom prst="rect">
+            <a:avLst/>
+          </a:prstGeom>
+          <a:solidFill>
+            <a:srgbClr val="F3F6FC"/>
+          </a:solidFill>
+          <a:ln w="12700">
+            <a:solidFill>
+              <a:srgbClr val="DCE3F2"/>
+            </a:solidFill>
+            <a:prstDash val="solid"/>
+          </a:ln>
+        </p:spPr>
+      </p:sp>
+      <p:sp>
+        <p:nvSpPr>
+          <p:cNvPr id="26" name="Shape 24"/>
+          <p:cNvSpPr/>
+          <p:nvPr/>
+        </p:nvSpPr>
+        <p:spPr>
+          <a:xfrm>
+            <a:off x="8357616" y="3429000"/>
+            <a:ext cx="100584" cy="100584"/>
+          </a:xfrm>
+          <a:prstGeom prst="ellipse">
+            <a:avLst/>
+          </a:prstGeom>
+          <a:solidFill>
+            <a:srgbClr val="00A896"/>
+          </a:solidFill>
+          <a:ln/>
+        </p:spPr>
+      </p:sp>
+      <p:sp>
+        <p:nvSpPr>
+          <p:cNvPr id="27" name="Text 25"/>
+          <p:cNvSpPr/>
+          <p:nvPr/>
+        </p:nvSpPr>
+        <p:spPr>
+          <a:xfrm>
+            <a:off x="8577072" y="3355848"/>
+            <a:ext cx="2898648" cy="292608"/>
+          </a:xfrm>
+          <a:prstGeom prst="rect">
+            <a:avLst/>
+          </a:prstGeom>
+          <a:noFill/>
+          <a:ln/>
+        </p:spPr>
+        <p:txBody>
+          <a:bodyPr wrap="square" lIns="0" tIns="0" rIns="0" bIns="0" rtlCol="0" anchor="ctr"/>
+          <a:lstStyle/>
+          <a:p>
+            <a:pPr marL="0" indent="0">
+              <a:buNone/>
+            </a:pPr>
+            <a:r>
+              <a:rPr lang="en-US" sz="1250" b="1" dirty="0">
+                <a:solidFill>
+                  <a:srgbClr val="1E2761"/>
+                </a:solidFill>
+                <a:latin typeface="Calibri" pitchFamily="34" charset="0"/>
+                <a:ea typeface="Calibri" pitchFamily="34" charset="-122"/>
+                <a:cs typeface="Calibri" pitchFamily="34" charset="-120"/>
+              </a:rPr>
+              <a:t>Database &amp; ORM</a:t>
+            </a:r>
+            <a:endParaRPr lang="en-US" sz="1250" dirty="0"/>
+          </a:p>
+        </p:txBody>
+      </p:sp>
+      <p:sp>
+        <p:nvSpPr>
+          <p:cNvPr id="28" name="Text 26"/>
+          <p:cNvSpPr/>
+          <p:nvPr/>
+        </p:nvSpPr>
+        <p:spPr>
+          <a:xfrm>
+            <a:off x="8357616" y="3685032"/>
+            <a:ext cx="3127248" cy="576072"/>
+          </a:xfrm>
+          <a:prstGeom prst="rect">
+            <a:avLst/>
+          </a:prstGeom>
+          <a:noFill/>
+          <a:ln/>
+        </p:spPr>
+        <p:txBody>
+          <a:bodyPr wrap="square" lIns="0" tIns="0" rIns="0" bIns="0" rtlCol="0" anchor="t"/>
+          <a:lstStyle/>
+          <a:p>
+            <a:pPr marL="0" indent="0">
+              <a:lnSpc>
+                <a:spcPct val="120000"/>
+              </a:lnSpc>
+              <a:buNone/>
+            </a:pPr>
+            <a:r>
+              <a:rPr lang="en-US" sz="1020" dirty="0">
+                <a:solidFill>
+                  <a:srgbClr val="1B2340"/>
+                </a:solidFill>
+                <a:latin typeface="Calibri" pitchFamily="34" charset="0"/>
+                <a:ea typeface="Calibri" pitchFamily="34" charset="-122"/>
+                <a:cs typeface="Calibri" pitchFamily="34" charset="-120"/>
+              </a:rPr>
+              <a:t>PostgreSQL 16 + Prisma (Decimal precision)</a:t>
+            </a:r>
+            <a:endParaRPr lang="en-US" sz="1020" dirty="0"/>
+          </a:p>
+        </p:txBody>
+      </p:sp>
+      <p:sp>
+        <p:nvSpPr>
+          <p:cNvPr id="29" name="Shape 27"/>
+          <p:cNvSpPr/>
+          <p:nvPr/>
+        </p:nvSpPr>
+        <p:spPr>
+          <a:xfrm>
+            <a:off x="548640" y="4562856"/>
+            <a:ext cx="3538728" cy="1078992"/>
+          </a:xfrm>
+          <a:prstGeom prst="rect">
+            <a:avLst/>
+          </a:prstGeom>
+          <a:solidFill>
+            <a:srgbClr val="F3F6FC"/>
+          </a:solidFill>
+          <a:ln w="12700">
+            <a:solidFill>
+              <a:srgbClr val="DCE3F2"/>
+            </a:solidFill>
+            <a:prstDash val="solid"/>
+          </a:ln>
+        </p:spPr>
+      </p:sp>
+      <p:sp>
+        <p:nvSpPr>
+          <p:cNvPr id="30" name="Shape 28"/>
+          <p:cNvSpPr/>
+          <p:nvPr/>
+        </p:nvSpPr>
+        <p:spPr>
+          <a:xfrm>
+            <a:off x="768096" y="4727448"/>
+            <a:ext cx="100584" cy="100584"/>
+          </a:xfrm>
+          <a:prstGeom prst="ellipse">
+            <a:avLst/>
+          </a:prstGeom>
+          <a:solidFill>
+            <a:srgbClr val="00A896"/>
+          </a:solidFill>
+          <a:ln/>
+        </p:spPr>
+      </p:sp>
+      <p:sp>
+        <p:nvSpPr>
+          <p:cNvPr id="31" name="Text 29"/>
+          <p:cNvSpPr/>
+          <p:nvPr/>
+        </p:nvSpPr>
+        <p:spPr>
+          <a:xfrm>
+            <a:off x="987552" y="4654296"/>
+            <a:ext cx="2898648" cy="292608"/>
+          </a:xfrm>
+          <a:prstGeom prst="rect">
+            <a:avLst/>
+          </a:prstGeom>
+          <a:noFill/>
+          <a:ln/>
+        </p:spPr>
+        <p:txBody>
+          <a:bodyPr wrap="square" lIns="0" tIns="0" rIns="0" bIns="0" rtlCol="0" anchor="ctr"/>
+          <a:lstStyle/>
+          <a:p>
+            <a:pPr marL="0" indent="0">
+              <a:buNone/>
+            </a:pPr>
+            <a:r>
+              <a:rPr lang="en-US" sz="1250" b="1" dirty="0">
+                <a:solidFill>
+                  <a:srgbClr val="1E2761"/>
+                </a:solidFill>
+                <a:latin typeface="Calibri" pitchFamily="34" charset="0"/>
+                <a:ea typeface="Calibri" pitchFamily="34" charset="-122"/>
+                <a:cs typeface="Calibri" pitchFamily="34" charset="-120"/>
+              </a:rPr>
+              <a:t>Cache &amp; Queues</a:t>
+            </a:r>
+            <a:endParaRPr lang="en-US" sz="1250" dirty="0"/>
+          </a:p>
+        </p:txBody>
+      </p:sp>
+      <p:sp>
+        <p:nvSpPr>
+          <p:cNvPr id="32" name="Text 30"/>
+          <p:cNvSpPr/>
+          <p:nvPr/>
+        </p:nvSpPr>
+        <p:spPr>
+          <a:xfrm>
+            <a:off x="768096" y="4983480"/>
+            <a:ext cx="3127248" cy="576072"/>
+          </a:xfrm>
+          <a:prstGeom prst="rect">
+            <a:avLst/>
+          </a:prstGeom>
+          <a:noFill/>
+          <a:ln/>
+        </p:spPr>
+        <p:txBody>
+          <a:bodyPr wrap="square" lIns="0" tIns="0" rIns="0" bIns="0" rtlCol="0" anchor="t"/>
+          <a:lstStyle/>
+          <a:p>
+            <a:pPr marL="0" indent="0">
+              <a:lnSpc>
+                <a:spcPct val="120000"/>
+              </a:lnSpc>
+              <a:buNone/>
+            </a:pPr>
+            <a:r>
+              <a:rPr lang="en-US" sz="1020" dirty="0">
+                <a:solidFill>
+                  <a:srgbClr val="1B2340"/>
+                </a:solidFill>
+                <a:latin typeface="Calibri" pitchFamily="34" charset="0"/>
+                <a:ea typeface="Calibri" pitchFamily="34" charset="-122"/>
+                <a:cs typeface="Calibri" pitchFamily="34" charset="-120"/>
+              </a:rPr>
+              <a:t>Redis 7 + BullMQ (async jobs, price cache)</a:t>
+            </a:r>
+            <a:endParaRPr lang="en-US" sz="1020" dirty="0"/>
+          </a:p>
+        </p:txBody>
+      </p:sp>
+      <p:sp>
+        <p:nvSpPr>
+          <p:cNvPr id="33" name="Shape 31"/>
+          <p:cNvSpPr/>
+          <p:nvPr/>
+        </p:nvSpPr>
+        <p:spPr>
+          <a:xfrm>
+            <a:off x="4343400" y="4562856"/>
+            <a:ext cx="3538728" cy="1078992"/>
+          </a:xfrm>
+          <a:prstGeom prst="rect">
+            <a:avLst/>
+          </a:prstGeom>
+          <a:solidFill>
+            <a:srgbClr val="F3F6FC"/>
+          </a:solidFill>
+          <a:ln w="12700">
+            <a:solidFill>
+              <a:srgbClr val="DCE3F2"/>
+            </a:solidFill>
+            <a:prstDash val="solid"/>
+          </a:ln>
+        </p:spPr>
+      </p:sp>
+      <p:sp>
+        <p:nvSpPr>
+          <p:cNvPr id="34" name="Shape 32"/>
+          <p:cNvSpPr/>
+          <p:nvPr/>
+        </p:nvSpPr>
+        <p:spPr>
+          <a:xfrm>
+            <a:off x="4562856" y="4727448"/>
+            <a:ext cx="100584" cy="100584"/>
+          </a:xfrm>
+          <a:prstGeom prst="ellipse">
+            <a:avLst/>
+          </a:prstGeom>
+          <a:solidFill>
+            <a:srgbClr val="00A896"/>
+          </a:solidFill>
+          <a:ln/>
+        </p:spPr>
+      </p:sp>
+      <p:sp>
+        <p:nvSpPr>
+          <p:cNvPr id="35" name="Text 33"/>
+          <p:cNvSpPr/>
+          <p:nvPr/>
+        </p:nvSpPr>
+        <p:spPr>
+          <a:xfrm>
+            <a:off x="4782312" y="4654296"/>
+            <a:ext cx="2898648" cy="292608"/>
+          </a:xfrm>
+          <a:prstGeom prst="rect">
+            <a:avLst/>
+          </a:prstGeom>
+          <a:noFill/>
+          <a:ln/>
+        </p:spPr>
+        <p:txBody>
+          <a:bodyPr wrap="square" lIns="0" tIns="0" rIns="0" bIns="0" rtlCol="0" anchor="ctr"/>
+          <a:lstStyle/>
+          <a:p>
+            <a:pPr marL="0" indent="0">
+              <a:buNone/>
+            </a:pPr>
+            <a:r>
+              <a:rPr lang="en-US" sz="1250" b="1" dirty="0">
+                <a:solidFill>
+                  <a:srgbClr val="1E2761"/>
+                </a:solidFill>
+                <a:latin typeface="Calibri" pitchFamily="34" charset="0"/>
+                <a:ea typeface="Calibri" pitchFamily="34" charset="-122"/>
+                <a:cs typeface="Calibri" pitchFamily="34" charset="-120"/>
+              </a:rPr>
+              <a:t>Data Visualization</a:t>
+            </a:r>
+            <a:endParaRPr lang="en-US" sz="1250" dirty="0"/>
+          </a:p>
+        </p:txBody>
+      </p:sp>
+      <p:sp>
+        <p:nvSpPr>
+          <p:cNvPr id="36" name="Text 34"/>
+          <p:cNvSpPr/>
+          <p:nvPr/>
+        </p:nvSpPr>
+        <p:spPr>
+          <a:xfrm>
+            <a:off x="4562856" y="4983480"/>
+            <a:ext cx="3127248" cy="576072"/>
+          </a:xfrm>
+          <a:prstGeom prst="rect">
+            <a:avLst/>
+          </a:prstGeom>
+          <a:noFill/>
+          <a:ln/>
+        </p:spPr>
+        <p:txBody>
+          <a:bodyPr wrap="square" lIns="0" tIns="0" rIns="0" bIns="0" rtlCol="0" anchor="t"/>
+          <a:lstStyle/>
+          <a:p>
+            <a:pPr marL="0" indent="0">
+              <a:lnSpc>
+                <a:spcPct val="120000"/>
+              </a:lnSpc>
+              <a:buNone/>
+            </a:pPr>
+            <a:r>
+              <a:rPr lang="en-US" sz="1020" dirty="0">
+                <a:solidFill>
+                  <a:srgbClr val="1B2340"/>
+                </a:solidFill>
+                <a:latin typeface="Calibri" pitchFamily="34" charset="0"/>
+                <a:ea typeface="Calibri" pitchFamily="34" charset="-122"/>
+                <a:cs typeface="Calibri" pitchFamily="34" charset="-120"/>
+              </a:rPr>
+              <a:t>Recharts + Apache ECharts</a:t>
+            </a:r>
+            <a:endParaRPr lang="en-US" sz="1020" dirty="0"/>
+          </a:p>
+        </p:txBody>
+      </p:sp>
+      <p:sp>
+        <p:nvSpPr>
+          <p:cNvPr id="37" name="Shape 35"/>
+          <p:cNvSpPr/>
+          <p:nvPr/>
+        </p:nvSpPr>
+        <p:spPr>
+          <a:xfrm>
+            <a:off x="8138160" y="4562856"/>
+            <a:ext cx="3538728" cy="1078992"/>
+          </a:xfrm>
+          <a:prstGeom prst="rect">
+            <a:avLst/>
+          </a:prstGeom>
+          <a:solidFill>
+            <a:srgbClr val="F3F6FC"/>
+          </a:solidFill>
+          <a:ln w="12700">
+            <a:solidFill>
+              <a:srgbClr val="DCE3F2"/>
+            </a:solidFill>
+            <a:prstDash val="solid"/>
+          </a:ln>
+        </p:spPr>
+      </p:sp>
+      <p:sp>
+        <p:nvSpPr>
+          <p:cNvPr id="38" name="Shape 36"/>
+          <p:cNvSpPr/>
+          <p:nvPr/>
+        </p:nvSpPr>
+        <p:spPr>
+          <a:xfrm>
+            <a:off x="8357616" y="4727448"/>
+            <a:ext cx="100584" cy="100584"/>
+          </a:xfrm>
+          <a:prstGeom prst="ellipse">
+            <a:avLst/>
+          </a:prstGeom>
+          <a:solidFill>
+            <a:srgbClr val="00A896"/>
+          </a:solidFill>
+          <a:ln/>
+        </p:spPr>
+      </p:sp>
+      <p:sp>
+        <p:nvSpPr>
+          <p:cNvPr id="39" name="Text 37"/>
+          <p:cNvSpPr/>
+          <p:nvPr/>
+        </p:nvSpPr>
+        <p:spPr>
+          <a:xfrm>
+            <a:off x="8577072" y="4654296"/>
+            <a:ext cx="2898648" cy="292608"/>
+          </a:xfrm>
+          <a:prstGeom prst="rect">
+            <a:avLst/>
+          </a:prstGeom>
+          <a:noFill/>
+          <a:ln/>
+        </p:spPr>
+        <p:txBody>
+          <a:bodyPr wrap="square" lIns="0" tIns="0" rIns="0" bIns="0" rtlCol="0" anchor="ctr"/>
+          <a:lstStyle/>
+          <a:p>
+            <a:pPr marL="0" indent="0">
+              <a:buNone/>
+            </a:pPr>
+            <a:r>
+              <a:rPr lang="en-US" sz="1250" b="1" dirty="0">
+                <a:solidFill>
+                  <a:srgbClr val="1E2761"/>
+                </a:solidFill>
+                <a:latin typeface="Calibri" pitchFamily="34" charset="0"/>
+                <a:ea typeface="Calibri" pitchFamily="34" charset="-122"/>
+                <a:cs typeface="Calibri" pitchFamily="34" charset="-120"/>
+              </a:rPr>
+              <a:t>DevOps &amp; Cloud</a:t>
+            </a:r>
+            <a:endParaRPr lang="en-US" sz="1250" dirty="0"/>
+          </a:p>
+        </p:txBody>
+      </p:sp>
+      <p:sp>
+        <p:nvSpPr>
+          <p:cNvPr id="40" name="Text 38"/>
+          <p:cNvSpPr/>
+          <p:nvPr/>
+        </p:nvSpPr>
+        <p:spPr>
+          <a:xfrm>
+            <a:off x="8357616" y="4983480"/>
+            <a:ext cx="3127248" cy="576072"/>
+          </a:xfrm>
+          <a:prstGeom prst="rect">
+            <a:avLst/>
+          </a:prstGeom>
+          <a:noFill/>
+          <a:ln/>
+        </p:spPr>
+        <p:txBody>
+          <a:bodyPr wrap="square" lIns="0" tIns="0" rIns="0" bIns="0" rtlCol="0" anchor="t"/>
+          <a:lstStyle/>
+          <a:p>
+            <a:pPr marL="0" indent="0">
+              <a:lnSpc>
+                <a:spcPct val="120000"/>
+              </a:lnSpc>
+              <a:buNone/>
+            </a:pPr>
+            <a:r>
+              <a:rPr lang="en-US" sz="1020" dirty="0">
+                <a:solidFill>
+                  <a:srgbClr val="1B2340"/>
+                </a:solidFill>
+                <a:latin typeface="Calibri" pitchFamily="34" charset="0"/>
+                <a:ea typeface="Calibri" pitchFamily="34" charset="-122"/>
+                <a:cs typeface="Calibri" pitchFamily="34" charset="-120"/>
+              </a:rPr>
+              <a:t>Docker, GitHub Actions, AWS ECS/RDS (ap-south-1 Mumbai)</a:t>
+            </a:r>
+            <a:endParaRPr lang="en-US" sz="1020" dirty="0"/>
+          </a:p>
+        </p:txBody>
+      </p:sp>
+      <p:sp>
+        <p:nvSpPr>
+          <p:cNvPr id="41" name="Text 39"/>
+          <p:cNvSpPr/>
+          <p:nvPr/>
+        </p:nvSpPr>
+        <p:spPr>
+          <a:xfrm>
+            <a:off x="457200" y="6473952"/>
+            <a:ext cx="7315200" cy="274320"/>
+          </a:xfrm>
+          <a:prstGeom prst="rect">
+            <a:avLst/>
+          </a:prstGeom>
+          <a:noFill/>
+          <a:ln/>
+        </p:spPr>
+        <p:txBody>
+          <a:bodyPr wrap="square" lIns="0" tIns="0" rIns="0" bIns="0" rtlCol="0" anchor="ctr"/>
+          <a:lstStyle/>
+          <a:p>
+            <a:pPr marL="0" indent="0">
+              <a:buNone/>
+            </a:pPr>
+            <a:r>
+              <a:rPr lang="en-US" sz="950" dirty="0">
+                <a:solidFill>
+                  <a:srgbClr val="5B6478"/>
+                </a:solidFill>
+                <a:latin typeface="Calibri" pitchFamily="34" charset="0"/>
+                <a:ea typeface="Calibri" pitchFamily="34" charset="-122"/>
+                <a:cs typeface="Calibri" pitchFamily="34" charset="-120"/>
+              </a:rPr>
+              <a:t>Wealth Compass · NSIQ Infotech</a:t>
+            </a:r>
+            <a:endParaRPr lang="en-US" sz="950" dirty="0"/>
+          </a:p>
+        </p:txBody>
+      </p:sp>
+      <p:sp>
+        <p:nvSpPr>
+          <p:cNvPr id="42" name="Text 40"/>
+          <p:cNvSpPr/>
+          <p:nvPr/>
+        </p:nvSpPr>
+        <p:spPr>
+          <a:xfrm>
+            <a:off x="11368735" y="6473952"/>
+            <a:ext cx="457200" cy="274320"/>
+          </a:xfrm>
+          <a:prstGeom prst="rect">
+            <a:avLst/>
+          </a:prstGeom>
+          <a:noFill/>
+          <a:ln/>
+        </p:spPr>
+        <p:txBody>
+          <a:bodyPr wrap="square" lIns="0" tIns="0" rIns="0" bIns="0" rtlCol="0" anchor="ctr"/>
+          <a:lstStyle/>
+          <a:p>
+            <a:pPr marL="0" indent="0" algn="r">
+              <a:buNone/>
+            </a:pPr>
+            <a:r>
+              <a:rPr lang="en-US" sz="950" dirty="0">
+                <a:solidFill>
+                  <a:srgbClr val="5B6478"/>
+                </a:solidFill>
+                <a:latin typeface="Calibri" pitchFamily="34" charset="0"/>
+                <a:ea typeface="Calibri" pitchFamily="34" charset="-122"/>
+                <a:cs typeface="Calibri" pitchFamily="34" charset="-120"/>
+              </a:rPr>
+              <a:t>6</a:t>
+            </a:r>
+            <a:endParaRPr lang="en-US" sz="950" dirty="0"/>
+          </a:p>
+        </p:txBody>
+      </p:sp>
+    </p:spTree>
+  </p:cSld>
+  <p:clrMapOvr>
+    <a:masterClrMapping/>
+  </p:clrMapOvr>
+</p:sld>
+</file>
+
+<file path=ppt/slides/slide11.xml><?xml version="1.0" encoding="utf-8"?>
 <p:sld xmlns:a="http://schemas.openxmlformats.org/drawingml/2006/main" xmlns:r="http://schemas.openxmlformats.org/officeDocument/2006/relationships" xmlns:p="http://schemas.openxmlformats.org/presentationml/2006/main">
   <p:cSld name="Slide 9">
     <p:spTree>
@@ -3467,7 +5041,7 @@
 </p:sld>
 </file>
 
-<file path=ppt/slides/slide11.xml><?xml version="1.0" encoding="utf-8"?>
+<file path=ppt/slides/slide12.xml><?xml version="1.0" encoding="utf-8"?>
 <p:sld xmlns:a="http://schemas.openxmlformats.org/drawingml/2006/main" xmlns:r="http://schemas.openxmlformats.org/officeDocument/2006/relationships" xmlns:p="http://schemas.openxmlformats.org/presentationml/2006/main">
   <p:cSld>
     <p:bg>
@@ -6219,7 +7793,7 @@
 </p:sld>
 </file>
 
-<file path=ppt/slides/slide12.xml><?xml version="1.0" encoding="utf-8"?>
+<file path=ppt/slides/slide13.xml><?xml version="1.0" encoding="utf-8"?>
 <p:sld xmlns:a="http://schemas.openxmlformats.org/drawingml/2006/main" xmlns:r="http://schemas.openxmlformats.org/officeDocument/2006/relationships" xmlns:p="http://schemas.openxmlformats.org/presentationml/2006/main">
   <p:cSld name="Slide 10">
     <p:spTree>
@@ -7598,7 +9172,7 @@
 </p:sld>
 </file>
 
-<file path=ppt/slides/slide13.xml><?xml version="1.0" encoding="utf-8"?>
+<file path=ppt/slides/slide14.xml><?xml version="1.0" encoding="utf-8"?>
 <p:sld xmlns:a="http://schemas.openxmlformats.org/drawingml/2006/main" xmlns:r="http://schemas.openxmlformats.org/officeDocument/2006/relationships" xmlns:p="http://schemas.openxmlformats.org/presentationml/2006/main">
   <p:cSld name="Slide 11">
     <p:bg>
@@ -7811,6 +9385,336 @@
 
 <file path=ppt/slides/slide2.xml><?xml version="1.0" encoding="utf-8"?>
 <p:sld xmlns:a="http://schemas.openxmlformats.org/drawingml/2006/main" xmlns:r="http://schemas.openxmlformats.org/officeDocument/2006/relationships" xmlns:p="http://schemas.openxmlformats.org/presentationml/2006/main">
+  <p:cSld>
+    <p:bg>
+      <p:bgPr>
+        <a:solidFill>
+          <a:srgbClr val="1E2761"/>
+        </a:solidFill>
+        <a:effectLst/>
+      </p:bgPr>
+    </p:bg>
+    <p:spTree>
+      <p:nvGrpSpPr>
+        <p:cNvPr id="1" name="">
+          <a:extLst>
+            <a:ext uri="{FF2B5EF4-FFF2-40B4-BE49-F238E27FC236}">
+              <a16:creationId xmlns:a16="http://schemas.microsoft.com/office/drawing/2014/main" id="{E8EF7BB0-D0B6-9DC1-BABF-DD529EC2846C}"/>
+            </a:ext>
+          </a:extLst>
+        </p:cNvPr>
+        <p:cNvGrpSpPr/>
+        <p:nvPr/>
+      </p:nvGrpSpPr>
+      <p:grpSpPr>
+        <a:xfrm>
+          <a:off x="0" y="0"/>
+          <a:ext cx="0" cy="0"/>
+          <a:chOff x="0" y="0"/>
+          <a:chExt cx="0" cy="0"/>
+        </a:xfrm>
+      </p:grpSpPr>
+      <p:sp>
+        <p:nvSpPr>
+          <p:cNvPr id="2" name="Shape 0">
+            <a:extLst>
+              <a:ext uri="{FF2B5EF4-FFF2-40B4-BE49-F238E27FC236}">
+                <a16:creationId xmlns:a16="http://schemas.microsoft.com/office/drawing/2014/main" id="{03998DF5-E3DB-8993-2399-62D369EE8E46}"/>
+              </a:ext>
+            </a:extLst>
+          </p:cNvPr>
+          <p:cNvSpPr/>
+          <p:nvPr/>
+        </p:nvSpPr>
+        <p:spPr>
+          <a:xfrm>
+            <a:off x="9692640" y="-1463040"/>
+            <a:ext cx="4754880" cy="4754880"/>
+          </a:xfrm>
+          <a:prstGeom prst="ellipse">
+            <a:avLst/>
+          </a:prstGeom>
+          <a:solidFill>
+            <a:srgbClr val="141B47"/>
+          </a:solidFill>
+          <a:ln/>
+        </p:spPr>
+      </p:sp>
+      <p:sp>
+        <p:nvSpPr>
+          <p:cNvPr id="3" name="Shape 1">
+            <a:extLst>
+              <a:ext uri="{FF2B5EF4-FFF2-40B4-BE49-F238E27FC236}">
+                <a16:creationId xmlns:a16="http://schemas.microsoft.com/office/drawing/2014/main" id="{DD4A4D85-3506-B176-45F1-8AA491E3C0E0}"/>
+              </a:ext>
+            </a:extLst>
+          </p:cNvPr>
+          <p:cNvSpPr/>
+          <p:nvPr/>
+        </p:nvSpPr>
+        <p:spPr>
+          <a:xfrm>
+            <a:off x="10881360" y="4206240"/>
+            <a:ext cx="2926080" cy="2926080"/>
+          </a:xfrm>
+          <a:prstGeom prst="ellipse">
+            <a:avLst/>
+          </a:prstGeom>
+          <a:solidFill>
+            <a:srgbClr val="141B47"/>
+          </a:solidFill>
+          <a:ln/>
+        </p:spPr>
+      </p:sp>
+      <p:sp>
+        <p:nvSpPr>
+          <p:cNvPr id="4" name="Shape 2">
+            <a:extLst>
+              <a:ext uri="{FF2B5EF4-FFF2-40B4-BE49-F238E27FC236}">
+                <a16:creationId xmlns:a16="http://schemas.microsoft.com/office/drawing/2014/main" id="{D94D2F0C-D994-FD01-EBB4-1280B05754C4}"/>
+              </a:ext>
+            </a:extLst>
+          </p:cNvPr>
+          <p:cNvSpPr/>
+          <p:nvPr/>
+        </p:nvSpPr>
+        <p:spPr>
+          <a:xfrm>
+            <a:off x="-1280160" y="4846320"/>
+            <a:ext cx="3291840" cy="3291840"/>
+          </a:xfrm>
+          <a:prstGeom prst="ellipse">
+            <a:avLst/>
+          </a:prstGeom>
+          <a:solidFill>
+            <a:srgbClr val="141B47"/>
+          </a:solidFill>
+          <a:ln/>
+        </p:spPr>
+      </p:sp>
+      <p:sp>
+        <p:nvSpPr>
+          <p:cNvPr id="5" name="Text 3">
+            <a:extLst>
+              <a:ext uri="{FF2B5EF4-FFF2-40B4-BE49-F238E27FC236}">
+                <a16:creationId xmlns:a16="http://schemas.microsoft.com/office/drawing/2014/main" id="{B1D805FC-7675-A342-9AA0-A0FD0194CC4F}"/>
+              </a:ext>
+            </a:extLst>
+          </p:cNvPr>
+          <p:cNvSpPr/>
+          <p:nvPr/>
+        </p:nvSpPr>
+        <p:spPr>
+          <a:xfrm>
+            <a:off x="822960" y="685800"/>
+            <a:ext cx="8229600" cy="320040"/>
+          </a:xfrm>
+          <a:prstGeom prst="rect">
+            <a:avLst/>
+          </a:prstGeom>
+          <a:noFill/>
+          <a:ln/>
+        </p:spPr>
+        <p:txBody>
+          <a:bodyPr wrap="square" lIns="0" tIns="0" rIns="0" bIns="0" rtlCol="0" anchor="ctr"/>
+          <a:lstStyle/>
+          <a:p>
+            <a:pPr marL="0" marR="0" lvl="0" indent="0" algn="l" defTabSz="914400" rtl="0" eaLnBrk="1" fontAlgn="auto" latinLnBrk="0" hangingPunct="1">
+              <a:lnSpc>
+                <a:spcPct val="100000"/>
+              </a:lnSpc>
+              <a:spcBef>
+                <a:spcPts val="0"/>
+              </a:spcBef>
+              <a:spcAft>
+                <a:spcPts val="0"/>
+              </a:spcAft>
+              <a:buClrTx/>
+              <a:buSzTx/>
+              <a:buFontTx/>
+              <a:buNone/>
+              <a:tabLst/>
+              <a:defRPr/>
+            </a:pPr>
+            <a:r>
+              <a:rPr lang="en-US" sz="1300" b="1" kern="0" spc="200" dirty="0">
+                <a:solidFill>
+                  <a:srgbClr val="D4A017"/>
+                </a:solidFill>
+                <a:latin typeface="Calibri" pitchFamily="34" charset="0"/>
+                <a:ea typeface="Calibri" pitchFamily="34" charset="-122"/>
+                <a:cs typeface="Calibri" pitchFamily="34" charset="-120"/>
+              </a:rPr>
+              <a:t>NSIQ INFOTECH HACKATHON CHALLENGE</a:t>
+            </a:r>
+          </a:p>
+        </p:txBody>
+      </p:sp>
+      <p:sp>
+        <p:nvSpPr>
+          <p:cNvPr id="6" name="Text 4">
+            <a:extLst>
+              <a:ext uri="{FF2B5EF4-FFF2-40B4-BE49-F238E27FC236}">
+                <a16:creationId xmlns:a16="http://schemas.microsoft.com/office/drawing/2014/main" id="{700F2413-1B28-E4C1-5FAF-5D2423B0C025}"/>
+              </a:ext>
+            </a:extLst>
+          </p:cNvPr>
+          <p:cNvSpPr/>
+          <p:nvPr/>
+        </p:nvSpPr>
+        <p:spPr>
+          <a:xfrm>
+            <a:off x="777240" y="1325880"/>
+            <a:ext cx="10515600" cy="1371600"/>
+          </a:xfrm>
+          <a:prstGeom prst="rect">
+            <a:avLst/>
+          </a:prstGeom>
+          <a:noFill/>
+          <a:ln/>
+        </p:spPr>
+        <p:txBody>
+          <a:bodyPr wrap="square" lIns="0" tIns="0" rIns="0" bIns="0" rtlCol="0" anchor="ctr"/>
+          <a:lstStyle/>
+          <a:p>
+            <a:pPr lvl="0">
+              <a:defRPr/>
+            </a:pPr>
+            <a:r>
+              <a:rPr lang="en-IN" sz="6000" b="1" dirty="0">
+                <a:solidFill>
+                  <a:srgbClr val="FFFFFF"/>
+                </a:solidFill>
+                <a:latin typeface="Cambria" pitchFamily="34" charset="0"/>
+                <a:ea typeface="Cambria" pitchFamily="34" charset="-122"/>
+              </a:rPr>
+              <a:t>PROBLEM STATEMENT </a:t>
+            </a:r>
+            <a:endParaRPr lang="en-US" sz="6000" b="1" dirty="0">
+              <a:solidFill>
+                <a:srgbClr val="FFFFFF"/>
+              </a:solidFill>
+              <a:latin typeface="Cambria" pitchFamily="34" charset="0"/>
+              <a:ea typeface="Cambria" pitchFamily="34" charset="-122"/>
+            </a:endParaRPr>
+          </a:p>
+        </p:txBody>
+      </p:sp>
+      <p:sp>
+        <p:nvSpPr>
+          <p:cNvPr id="7" name="Text 5">
+            <a:extLst>
+              <a:ext uri="{FF2B5EF4-FFF2-40B4-BE49-F238E27FC236}">
+                <a16:creationId xmlns:a16="http://schemas.microsoft.com/office/drawing/2014/main" id="{96720832-54F4-1105-C3BA-FEFF8309C11C}"/>
+              </a:ext>
+            </a:extLst>
+          </p:cNvPr>
+          <p:cNvSpPr/>
+          <p:nvPr/>
+        </p:nvSpPr>
+        <p:spPr>
+          <a:xfrm>
+            <a:off x="822960" y="3246120"/>
+            <a:ext cx="9875520" cy="548640"/>
+          </a:xfrm>
+          <a:prstGeom prst="rect">
+            <a:avLst/>
+          </a:prstGeom>
+          <a:noFill/>
+          <a:ln/>
+        </p:spPr>
+        <p:txBody>
+          <a:bodyPr wrap="square" lIns="0" tIns="0" rIns="0" bIns="0" rtlCol="0" anchor="ctr"/>
+          <a:lstStyle/>
+          <a:p>
+            <a:pPr lvl="0">
+              <a:defRPr/>
+            </a:pPr>
+            <a:r>
+              <a:rPr lang="en-IN" sz="2200" dirty="0">
+                <a:solidFill>
+                  <a:srgbClr val="F3F6FC"/>
+                </a:solidFill>
+                <a:latin typeface="Calibri" pitchFamily="34" charset="0"/>
+                <a:ea typeface="Calibri" pitchFamily="34" charset="-122"/>
+                <a:cs typeface="Calibri" pitchFamily="34" charset="-120"/>
+              </a:rPr>
+              <a:t>Individual investors hold assets across multiple platforms, resulting in fragmented information and limited visibility into overall financial position. Without a centralized system, tracking portfolio performance, assessing diversification, monitoring risk exposure, and identifying trends becomes difficult. Build a system that consolidates portfolio data, monitors performance</a:t>
+            </a:r>
+            <a:r>
+              <a:rPr lang="en-IN" dirty="0"/>
+              <a:t> </a:t>
+            </a:r>
+            <a:r>
+              <a:rPr lang="en-IN" sz="2200" dirty="0">
+                <a:solidFill>
+                  <a:srgbClr val="F3F6FC"/>
+                </a:solidFill>
+                <a:latin typeface="Calibri" pitchFamily="34" charset="0"/>
+                <a:ea typeface="Calibri" pitchFamily="34" charset="-122"/>
+                <a:cs typeface="Calibri" pitchFamily="34" charset="-120"/>
+              </a:rPr>
+              <a:t>, analyses asset allocation, and generates risk insights</a:t>
+            </a:r>
+            <a:r>
+              <a:rPr lang="en-IN" dirty="0"/>
+              <a:t>.</a:t>
+            </a:r>
+            <a:endParaRPr lang="en-US" sz="2200" dirty="0">
+              <a:solidFill>
+                <a:srgbClr val="F3F6FC"/>
+              </a:solidFill>
+              <a:latin typeface="Calibri" pitchFamily="34" charset="0"/>
+              <a:ea typeface="Calibri" pitchFamily="34" charset="-122"/>
+              <a:cs typeface="Calibri" pitchFamily="34" charset="-120"/>
+            </a:endParaRPr>
+          </a:p>
+        </p:txBody>
+      </p:sp>
+      <p:sp>
+        <p:nvSpPr>
+          <p:cNvPr id="9" name="Shape 7">
+            <a:extLst>
+              <a:ext uri="{FF2B5EF4-FFF2-40B4-BE49-F238E27FC236}">
+                <a16:creationId xmlns:a16="http://schemas.microsoft.com/office/drawing/2014/main" id="{4988918E-5455-2E4B-3E83-789C7F19D4E9}"/>
+              </a:ext>
+            </a:extLst>
+          </p:cNvPr>
+          <p:cNvSpPr/>
+          <p:nvPr/>
+        </p:nvSpPr>
+        <p:spPr>
+          <a:xfrm>
+            <a:off x="822960" y="5349240"/>
+            <a:ext cx="2743200" cy="0"/>
+          </a:xfrm>
+          <a:prstGeom prst="line">
+            <a:avLst/>
+          </a:prstGeom>
+          <a:noFill/>
+          <a:ln w="25400">
+            <a:solidFill>
+              <a:srgbClr val="00A896"/>
+            </a:solidFill>
+            <a:prstDash val="solid"/>
+          </a:ln>
+        </p:spPr>
+      </p:sp>
+    </p:spTree>
+    <p:extLst>
+      <p:ext uri="{BB962C8B-B14F-4D97-AF65-F5344CB8AC3E}">
+        <p14:creationId xmlns:p14="http://schemas.microsoft.com/office/powerpoint/2010/main" val="2959330472"/>
+      </p:ext>
+    </p:extLst>
+  </p:cSld>
+  <p:clrMapOvr>
+    <a:masterClrMapping/>
+  </p:clrMapOvr>
+</p:sld>
+</file>
+
+<file path=ppt/slides/slide3.xml><?xml version="1.0" encoding="utf-8"?>
+<p:sld xmlns:a="http://schemas.openxmlformats.org/drawingml/2006/main" xmlns:r="http://schemas.openxmlformats.org/officeDocument/2006/relationships" xmlns:p="http://schemas.openxmlformats.org/presentationml/2006/main">
   <p:cSld name="Slide 2">
     <p:spTree>
       <p:nvGrpSpPr>
@@ -8688,7 +10592,7 @@
 </p:sld>
 </file>
 
-<file path=ppt/slides/slide3.xml><?xml version="1.0" encoding="utf-8"?>
+<file path=ppt/slides/slide4.xml><?xml version="1.0" encoding="utf-8"?>
 <p:sld xmlns:a="http://schemas.openxmlformats.org/drawingml/2006/main" xmlns:r="http://schemas.openxmlformats.org/officeDocument/2006/relationships" xmlns:p="http://schemas.openxmlformats.org/presentationml/2006/main">
   <p:cSld name="Slide 3">
     <p:spTree>
@@ -9435,7 +11339,7 @@
 </p:sld>
 </file>
 
-<file path=ppt/slides/slide4.xml><?xml version="1.0" encoding="utf-8"?>
+<file path=ppt/slides/slide5.xml><?xml version="1.0" encoding="utf-8"?>
 <p:sld xmlns:a="http://schemas.openxmlformats.org/drawingml/2006/main" xmlns:r="http://schemas.openxmlformats.org/officeDocument/2006/relationships" xmlns:p="http://schemas.openxmlformats.org/presentationml/2006/main">
   <p:cSld name="Slide 4">
     <p:bg>
@@ -10997,7 +12901,7 @@
 </p:sld>
 </file>
 
-<file path=ppt/slides/slide5.xml><?xml version="1.0" encoding="utf-8"?>
+<file path=ppt/slides/slide6.xml><?xml version="1.0" encoding="utf-8"?>
 <p:sld xmlns:a="http://schemas.openxmlformats.org/drawingml/2006/main" xmlns:r="http://schemas.openxmlformats.org/officeDocument/2006/relationships" xmlns:p="http://schemas.openxmlformats.org/presentationml/2006/main">
   <p:cSld name="Slide 5">
     <p:bg>
@@ -11586,7 +13490,7 @@
 </p:sld>
 </file>
 
-<file path=ppt/slides/slide6.xml><?xml version="1.0" encoding="utf-8"?>
+<file path=ppt/slides/slide7.xml><?xml version="1.0" encoding="utf-8"?>
 <p:sld xmlns:a="http://schemas.openxmlformats.org/drawingml/2006/main" xmlns:r="http://schemas.openxmlformats.org/officeDocument/2006/relationships" xmlns:p="http://schemas.openxmlformats.org/presentationml/2006/main">
   <p:cSld name="Slide 6">
     <p:spTree>
@@ -12590,7 +14494,7 @@
 </p:sld>
 </file>
 
-<file path=ppt/slides/slide7.xml><?xml version="1.0" encoding="utf-8"?>
+<file path=ppt/slides/slide8.xml><?xml version="1.0" encoding="utf-8"?>
 <p:sld xmlns:a="http://schemas.openxmlformats.org/drawingml/2006/main" xmlns:r="http://schemas.openxmlformats.org/officeDocument/2006/relationships" xmlns:p="http://schemas.openxmlformats.org/presentationml/2006/main">
   <p:cSld name="Slide 7">
     <p:bg>
@@ -13404,7 +15308,7 @@
 </p:sld>
 </file>
 
-<file path=ppt/slides/slide8.xml><?xml version="1.0" encoding="utf-8"?>
+<file path=ppt/slides/slide9.xml><?xml version="1.0" encoding="utf-8"?>
 <p:sld xmlns:a="http://schemas.openxmlformats.org/drawingml/2006/main" xmlns:r="http://schemas.openxmlformats.org/officeDocument/2006/relationships" xmlns:p="http://schemas.openxmlformats.org/presentationml/2006/main">
   <p:cSld name="Slide 8">
     <p:spTree>
@@ -14857,1381 +16761,6 @@
               <a:t>08</a:t>
             </a:r>
             <a:endParaRPr lang="en-US" sz="1000" dirty="0"/>
-          </a:p>
-        </p:txBody>
-      </p:sp>
-    </p:spTree>
-  </p:cSld>
-  <p:clrMapOvr>
-    <a:masterClrMapping/>
-  </p:clrMapOvr>
-</p:sld>
-</file>
-
-<file path=ppt/slides/slide9.xml><?xml version="1.0" encoding="utf-8"?>
-<p:sld xmlns:a="http://schemas.openxmlformats.org/drawingml/2006/main" xmlns:r="http://schemas.openxmlformats.org/officeDocument/2006/relationships" xmlns:p="http://schemas.openxmlformats.org/presentationml/2006/main">
-  <p:cSld>
-    <p:spTree>
-      <p:nvGrpSpPr>
-        <p:cNvPr id="1" name=""/>
-        <p:cNvGrpSpPr/>
-        <p:nvPr/>
-      </p:nvGrpSpPr>
-      <p:grpSpPr>
-        <a:xfrm>
-          <a:off x="0" y="0"/>
-          <a:ext cx="0" cy="0"/>
-          <a:chOff x="0" y="0"/>
-          <a:chExt cx="0" cy="0"/>
-        </a:xfrm>
-      </p:grpSpPr>
-      <p:sp>
-        <p:nvSpPr>
-          <p:cNvPr id="2" name="Text 0"/>
-          <p:cNvSpPr/>
-          <p:nvPr/>
-        </p:nvSpPr>
-        <p:spPr>
-          <a:xfrm>
-            <a:off x="548640" y="384048"/>
-            <a:ext cx="5486400" cy="292608"/>
-          </a:xfrm>
-          <a:prstGeom prst="rect">
-            <a:avLst/>
-          </a:prstGeom>
-          <a:noFill/>
-          <a:ln/>
-        </p:spPr>
-        <p:txBody>
-          <a:bodyPr wrap="square" lIns="0" tIns="0" rIns="0" bIns="0" rtlCol="0" anchor="ctr"/>
-          <a:lstStyle/>
-          <a:p>
-            <a:pPr marL="0" indent="0">
-              <a:buNone/>
-            </a:pPr>
-            <a:r>
-              <a:rPr lang="en-US" sz="1300" b="1" kern="0" spc="200" dirty="0">
-                <a:solidFill>
-                  <a:srgbClr val="D4A017"/>
-                </a:solidFill>
-                <a:latin typeface="Calibri" pitchFamily="34" charset="0"/>
-                <a:ea typeface="Calibri" pitchFamily="34" charset="-122"/>
-                <a:cs typeface="Calibri" pitchFamily="34" charset="-120"/>
-              </a:rPr>
-              <a:t>TECHNOLOGY</a:t>
-            </a:r>
-            <a:r>
-              <a:rPr lang="en-US" sz="1200" b="1" kern="0" spc="200" dirty="0">
-                <a:solidFill>
-                  <a:srgbClr val="00A896"/>
-                </a:solidFill>
-                <a:latin typeface="Calibri" pitchFamily="34" charset="0"/>
-                <a:ea typeface="Calibri" pitchFamily="34" charset="-122"/>
-                <a:cs typeface="Calibri" pitchFamily="34" charset="-120"/>
-              </a:rPr>
-              <a:t> </a:t>
-            </a:r>
-            <a:r>
-              <a:rPr lang="en-US" sz="1300" b="1" kern="0" spc="200" dirty="0">
-                <a:solidFill>
-                  <a:srgbClr val="D4A017"/>
-                </a:solidFill>
-                <a:latin typeface="Calibri" pitchFamily="34" charset="0"/>
-                <a:ea typeface="Calibri" pitchFamily="34" charset="-122"/>
-                <a:cs typeface="Calibri" pitchFamily="34" charset="-120"/>
-              </a:rPr>
-              <a:t>STACK</a:t>
-            </a:r>
-          </a:p>
-        </p:txBody>
-      </p:sp>
-      <p:sp>
-        <p:nvSpPr>
-          <p:cNvPr id="3" name="Text 1"/>
-          <p:cNvSpPr/>
-          <p:nvPr/>
-        </p:nvSpPr>
-        <p:spPr>
-          <a:xfrm>
-            <a:off x="548640" y="713232"/>
-            <a:ext cx="10789920" cy="594360"/>
-          </a:xfrm>
-          <a:prstGeom prst="rect">
-            <a:avLst/>
-          </a:prstGeom>
-          <a:noFill/>
-          <a:ln/>
-        </p:spPr>
-        <p:txBody>
-          <a:bodyPr wrap="square" lIns="0" tIns="0" rIns="0" bIns="0" rtlCol="0" anchor="ctr"/>
-          <a:lstStyle/>
-          <a:p>
-            <a:pPr marL="0" indent="0">
-              <a:buNone/>
-            </a:pPr>
-            <a:r>
-              <a:rPr lang="en-US" sz="2800" b="1" dirty="0">
-                <a:solidFill>
-                  <a:srgbClr val="1B2340"/>
-                </a:solidFill>
-                <a:latin typeface="Cambria" pitchFamily="34" charset="0"/>
-                <a:ea typeface="Cambria" pitchFamily="34" charset="-122"/>
-                <a:cs typeface="Cambria" pitchFamily="34" charset="-120"/>
-              </a:rPr>
-              <a:t>Technologies &amp; tools planned for the build</a:t>
-            </a:r>
-            <a:endParaRPr lang="en-US" sz="2800" dirty="0"/>
-          </a:p>
-        </p:txBody>
-      </p:sp>
-      <p:sp>
-        <p:nvSpPr>
-          <p:cNvPr id="4" name="Text 2"/>
-          <p:cNvSpPr/>
-          <p:nvPr/>
-        </p:nvSpPr>
-        <p:spPr>
-          <a:xfrm>
-            <a:off x="548640" y="1353312"/>
-            <a:ext cx="10607040" cy="365760"/>
-          </a:xfrm>
-          <a:prstGeom prst="rect">
-            <a:avLst/>
-          </a:prstGeom>
-          <a:noFill/>
-          <a:ln/>
-        </p:spPr>
-        <p:txBody>
-          <a:bodyPr wrap="square" lIns="0" tIns="0" rIns="0" bIns="0" rtlCol="0" anchor="ctr"/>
-          <a:lstStyle/>
-          <a:p>
-            <a:pPr marL="0" indent="0">
-              <a:buNone/>
-            </a:pPr>
-            <a:r>
-              <a:rPr lang="en-US" sz="1300" dirty="0">
-                <a:solidFill>
-                  <a:srgbClr val="5B6478"/>
-                </a:solidFill>
-                <a:latin typeface="Calibri" pitchFamily="34" charset="0"/>
-                <a:ea typeface="Calibri" pitchFamily="34" charset="-122"/>
-                <a:cs typeface="Calibri" pitchFamily="34" charset="-120"/>
-              </a:rPr>
-              <a:t>Turborepo monorepo pairing a NestJS modular monolith with a specialized Python quant microservice.</a:t>
-            </a:r>
-            <a:endParaRPr lang="en-US" sz="1300" dirty="0"/>
-          </a:p>
-        </p:txBody>
-      </p:sp>
-      <p:sp>
-        <p:nvSpPr>
-          <p:cNvPr id="5" name="Shape 3"/>
-          <p:cNvSpPr/>
-          <p:nvPr/>
-        </p:nvSpPr>
-        <p:spPr>
-          <a:xfrm>
-            <a:off x="548640" y="1965960"/>
-            <a:ext cx="3538728" cy="1078992"/>
-          </a:xfrm>
-          <a:prstGeom prst="rect">
-            <a:avLst/>
-          </a:prstGeom>
-          <a:solidFill>
-            <a:srgbClr val="F3F6FC"/>
-          </a:solidFill>
-          <a:ln w="12700">
-            <a:solidFill>
-              <a:srgbClr val="DCE3F2"/>
-            </a:solidFill>
-            <a:prstDash val="solid"/>
-          </a:ln>
-        </p:spPr>
-      </p:sp>
-      <p:sp>
-        <p:nvSpPr>
-          <p:cNvPr id="6" name="Shape 4"/>
-          <p:cNvSpPr/>
-          <p:nvPr/>
-        </p:nvSpPr>
-        <p:spPr>
-          <a:xfrm>
-            <a:off x="768096" y="2130552"/>
-            <a:ext cx="100584" cy="100584"/>
-          </a:xfrm>
-          <a:prstGeom prst="ellipse">
-            <a:avLst/>
-          </a:prstGeom>
-          <a:solidFill>
-            <a:srgbClr val="00A896"/>
-          </a:solidFill>
-          <a:ln/>
-        </p:spPr>
-      </p:sp>
-      <p:sp>
-        <p:nvSpPr>
-          <p:cNvPr id="7" name="Text 5"/>
-          <p:cNvSpPr/>
-          <p:nvPr/>
-        </p:nvSpPr>
-        <p:spPr>
-          <a:xfrm>
-            <a:off x="987552" y="2057400"/>
-            <a:ext cx="2898648" cy="292608"/>
-          </a:xfrm>
-          <a:prstGeom prst="rect">
-            <a:avLst/>
-          </a:prstGeom>
-          <a:noFill/>
-          <a:ln/>
-        </p:spPr>
-        <p:txBody>
-          <a:bodyPr wrap="square" lIns="0" tIns="0" rIns="0" bIns="0" rtlCol="0" anchor="ctr"/>
-          <a:lstStyle/>
-          <a:p>
-            <a:pPr marL="0" indent="0">
-              <a:buNone/>
-            </a:pPr>
-            <a:r>
-              <a:rPr lang="en-US" sz="1250" b="1" dirty="0">
-                <a:solidFill>
-                  <a:srgbClr val="1E2761"/>
-                </a:solidFill>
-                <a:latin typeface="Calibri" pitchFamily="34" charset="0"/>
-                <a:ea typeface="Calibri" pitchFamily="34" charset="-122"/>
-                <a:cs typeface="Calibri" pitchFamily="34" charset="-120"/>
-              </a:rPr>
-              <a:t>Monorepo</a:t>
-            </a:r>
-            <a:endParaRPr lang="en-US" sz="1250" dirty="0"/>
-          </a:p>
-        </p:txBody>
-      </p:sp>
-      <p:sp>
-        <p:nvSpPr>
-          <p:cNvPr id="8" name="Text 6"/>
-          <p:cNvSpPr/>
-          <p:nvPr/>
-        </p:nvSpPr>
-        <p:spPr>
-          <a:xfrm>
-            <a:off x="768096" y="2386584"/>
-            <a:ext cx="3127248" cy="576072"/>
-          </a:xfrm>
-          <a:prstGeom prst="rect">
-            <a:avLst/>
-          </a:prstGeom>
-          <a:noFill/>
-          <a:ln/>
-        </p:spPr>
-        <p:txBody>
-          <a:bodyPr wrap="square" lIns="0" tIns="0" rIns="0" bIns="0" rtlCol="0" anchor="t"/>
-          <a:lstStyle/>
-          <a:p>
-            <a:pPr marL="0" indent="0">
-              <a:lnSpc>
-                <a:spcPct val="120000"/>
-              </a:lnSpc>
-              <a:buNone/>
-            </a:pPr>
-            <a:r>
-              <a:rPr lang="en-US" sz="1020" dirty="0">
-                <a:solidFill>
-                  <a:srgbClr val="1B2340"/>
-                </a:solidFill>
-                <a:latin typeface="Calibri" pitchFamily="34" charset="0"/>
-                <a:ea typeface="Calibri" pitchFamily="34" charset="-122"/>
-                <a:cs typeface="Calibri" pitchFamily="34" charset="-120"/>
-              </a:rPr>
-              <a:t>Turborepo + pnpm</a:t>
-            </a:r>
-            <a:endParaRPr lang="en-US" sz="1020" dirty="0"/>
-          </a:p>
-        </p:txBody>
-      </p:sp>
-      <p:sp>
-        <p:nvSpPr>
-          <p:cNvPr id="9" name="Shape 7"/>
-          <p:cNvSpPr/>
-          <p:nvPr/>
-        </p:nvSpPr>
-        <p:spPr>
-          <a:xfrm>
-            <a:off x="4343400" y="1965960"/>
-            <a:ext cx="3538728" cy="1078992"/>
-          </a:xfrm>
-          <a:prstGeom prst="rect">
-            <a:avLst/>
-          </a:prstGeom>
-          <a:solidFill>
-            <a:srgbClr val="F3F6FC"/>
-          </a:solidFill>
-          <a:ln w="12700">
-            <a:solidFill>
-              <a:srgbClr val="DCE3F2"/>
-            </a:solidFill>
-            <a:prstDash val="solid"/>
-          </a:ln>
-        </p:spPr>
-      </p:sp>
-      <p:sp>
-        <p:nvSpPr>
-          <p:cNvPr id="10" name="Shape 8"/>
-          <p:cNvSpPr/>
-          <p:nvPr/>
-        </p:nvSpPr>
-        <p:spPr>
-          <a:xfrm>
-            <a:off x="4562856" y="2130552"/>
-            <a:ext cx="100584" cy="100584"/>
-          </a:xfrm>
-          <a:prstGeom prst="ellipse">
-            <a:avLst/>
-          </a:prstGeom>
-          <a:solidFill>
-            <a:srgbClr val="00A896"/>
-          </a:solidFill>
-          <a:ln/>
-        </p:spPr>
-      </p:sp>
-      <p:sp>
-        <p:nvSpPr>
-          <p:cNvPr id="11" name="Text 9"/>
-          <p:cNvSpPr/>
-          <p:nvPr/>
-        </p:nvSpPr>
-        <p:spPr>
-          <a:xfrm>
-            <a:off x="4782312" y="2057400"/>
-            <a:ext cx="2898648" cy="292608"/>
-          </a:xfrm>
-          <a:prstGeom prst="rect">
-            <a:avLst/>
-          </a:prstGeom>
-          <a:noFill/>
-          <a:ln/>
-        </p:spPr>
-        <p:txBody>
-          <a:bodyPr wrap="square" lIns="0" tIns="0" rIns="0" bIns="0" rtlCol="0" anchor="ctr"/>
-          <a:lstStyle/>
-          <a:p>
-            <a:pPr marL="0" indent="0">
-              <a:buNone/>
-            </a:pPr>
-            <a:r>
-              <a:rPr lang="en-US" sz="1250" b="1" dirty="0">
-                <a:solidFill>
-                  <a:srgbClr val="1E2761"/>
-                </a:solidFill>
-                <a:latin typeface="Calibri" pitchFamily="34" charset="0"/>
-                <a:ea typeface="Calibri" pitchFamily="34" charset="-122"/>
-                <a:cs typeface="Calibri" pitchFamily="34" charset="-120"/>
-              </a:rPr>
-              <a:t>Web Frontend</a:t>
-            </a:r>
-            <a:endParaRPr lang="en-US" sz="1250" dirty="0"/>
-          </a:p>
-        </p:txBody>
-      </p:sp>
-      <p:sp>
-        <p:nvSpPr>
-          <p:cNvPr id="12" name="Text 10"/>
-          <p:cNvSpPr/>
-          <p:nvPr/>
-        </p:nvSpPr>
-        <p:spPr>
-          <a:xfrm>
-            <a:off x="4562856" y="2386584"/>
-            <a:ext cx="3127248" cy="576072"/>
-          </a:xfrm>
-          <a:prstGeom prst="rect">
-            <a:avLst/>
-          </a:prstGeom>
-          <a:noFill/>
-          <a:ln/>
-        </p:spPr>
-        <p:txBody>
-          <a:bodyPr wrap="square" lIns="0" tIns="0" rIns="0" bIns="0" rtlCol="0" anchor="t"/>
-          <a:lstStyle/>
-          <a:p>
-            <a:pPr marL="0" indent="0">
-              <a:lnSpc>
-                <a:spcPct val="120000"/>
-              </a:lnSpc>
-              <a:buNone/>
-            </a:pPr>
-            <a:r>
-              <a:rPr lang="en-US" sz="1020" dirty="0">
-                <a:solidFill>
-                  <a:srgbClr val="1B2340"/>
-                </a:solidFill>
-                <a:latin typeface="Calibri" pitchFamily="34" charset="0"/>
-                <a:ea typeface="Calibri" pitchFamily="34" charset="-122"/>
-                <a:cs typeface="Calibri" pitchFamily="34" charset="-120"/>
-              </a:rPr>
-              <a:t>Next.js 14 (App Router), React 18, Tailwind CSS, Shadcn UI</a:t>
-            </a:r>
-            <a:endParaRPr lang="en-US" sz="1020" dirty="0"/>
-          </a:p>
-        </p:txBody>
-      </p:sp>
-      <p:sp>
-        <p:nvSpPr>
-          <p:cNvPr id="13" name="Shape 11"/>
-          <p:cNvSpPr/>
-          <p:nvPr/>
-        </p:nvSpPr>
-        <p:spPr>
-          <a:xfrm>
-            <a:off x="8138160" y="1965960"/>
-            <a:ext cx="3538728" cy="1078992"/>
-          </a:xfrm>
-          <a:prstGeom prst="rect">
-            <a:avLst/>
-          </a:prstGeom>
-          <a:solidFill>
-            <a:srgbClr val="F3F6FC"/>
-          </a:solidFill>
-          <a:ln w="12700">
-            <a:solidFill>
-              <a:srgbClr val="DCE3F2"/>
-            </a:solidFill>
-            <a:prstDash val="solid"/>
-          </a:ln>
-        </p:spPr>
-      </p:sp>
-      <p:sp>
-        <p:nvSpPr>
-          <p:cNvPr id="14" name="Shape 12"/>
-          <p:cNvSpPr/>
-          <p:nvPr/>
-        </p:nvSpPr>
-        <p:spPr>
-          <a:xfrm>
-            <a:off x="8357616" y="2130552"/>
-            <a:ext cx="100584" cy="100584"/>
-          </a:xfrm>
-          <a:prstGeom prst="ellipse">
-            <a:avLst/>
-          </a:prstGeom>
-          <a:solidFill>
-            <a:srgbClr val="00A896"/>
-          </a:solidFill>
-          <a:ln/>
-        </p:spPr>
-      </p:sp>
-      <p:sp>
-        <p:nvSpPr>
-          <p:cNvPr id="15" name="Text 13"/>
-          <p:cNvSpPr/>
-          <p:nvPr/>
-        </p:nvSpPr>
-        <p:spPr>
-          <a:xfrm>
-            <a:off x="8577072" y="2057400"/>
-            <a:ext cx="2898648" cy="292608"/>
-          </a:xfrm>
-          <a:prstGeom prst="rect">
-            <a:avLst/>
-          </a:prstGeom>
-          <a:noFill/>
-          <a:ln/>
-        </p:spPr>
-        <p:txBody>
-          <a:bodyPr wrap="square" lIns="0" tIns="0" rIns="0" bIns="0" rtlCol="0" anchor="ctr"/>
-          <a:lstStyle/>
-          <a:p>
-            <a:pPr marL="0" indent="0">
-              <a:buNone/>
-            </a:pPr>
-            <a:r>
-              <a:rPr lang="en-US" sz="1250" b="1" dirty="0">
-                <a:solidFill>
-                  <a:srgbClr val="1E2761"/>
-                </a:solidFill>
-                <a:latin typeface="Calibri" pitchFamily="34" charset="0"/>
-                <a:ea typeface="Calibri" pitchFamily="34" charset="-122"/>
-                <a:cs typeface="Calibri" pitchFamily="34" charset="-120"/>
-              </a:rPr>
-              <a:t>Mobile App</a:t>
-            </a:r>
-            <a:endParaRPr lang="en-US" sz="1250" dirty="0"/>
-          </a:p>
-        </p:txBody>
-      </p:sp>
-      <p:sp>
-        <p:nvSpPr>
-          <p:cNvPr id="16" name="Text 14"/>
-          <p:cNvSpPr/>
-          <p:nvPr/>
-        </p:nvSpPr>
-        <p:spPr>
-          <a:xfrm>
-            <a:off x="8357616" y="2386584"/>
-            <a:ext cx="3127248" cy="576072"/>
-          </a:xfrm>
-          <a:prstGeom prst="rect">
-            <a:avLst/>
-          </a:prstGeom>
-          <a:noFill/>
-          <a:ln/>
-        </p:spPr>
-        <p:txBody>
-          <a:bodyPr wrap="square" lIns="0" tIns="0" rIns="0" bIns="0" rtlCol="0" anchor="t"/>
-          <a:lstStyle/>
-          <a:p>
-            <a:pPr marL="0" indent="0">
-              <a:lnSpc>
-                <a:spcPct val="120000"/>
-              </a:lnSpc>
-              <a:buNone/>
-            </a:pPr>
-            <a:r>
-              <a:rPr lang="en-US" sz="1020" dirty="0">
-                <a:solidFill>
-                  <a:srgbClr val="1B2340"/>
-                </a:solidFill>
-                <a:latin typeface="Calibri" pitchFamily="34" charset="0"/>
-                <a:ea typeface="Calibri" pitchFamily="34" charset="-122"/>
-                <a:cs typeface="Calibri" pitchFamily="34" charset="-120"/>
-              </a:rPr>
-              <a:t>React Native + Expo, React Navigation</a:t>
-            </a:r>
-            <a:endParaRPr lang="en-US" sz="1020" dirty="0"/>
-          </a:p>
-        </p:txBody>
-      </p:sp>
-      <p:sp>
-        <p:nvSpPr>
-          <p:cNvPr id="17" name="Shape 15"/>
-          <p:cNvSpPr/>
-          <p:nvPr/>
-        </p:nvSpPr>
-        <p:spPr>
-          <a:xfrm>
-            <a:off x="548640" y="3264408"/>
-            <a:ext cx="3538728" cy="1078992"/>
-          </a:xfrm>
-          <a:prstGeom prst="rect">
-            <a:avLst/>
-          </a:prstGeom>
-          <a:solidFill>
-            <a:srgbClr val="F3F6FC"/>
-          </a:solidFill>
-          <a:ln w="12700">
-            <a:solidFill>
-              <a:srgbClr val="DCE3F2"/>
-            </a:solidFill>
-            <a:prstDash val="solid"/>
-          </a:ln>
-        </p:spPr>
-      </p:sp>
-      <p:sp>
-        <p:nvSpPr>
-          <p:cNvPr id="18" name="Shape 16"/>
-          <p:cNvSpPr/>
-          <p:nvPr/>
-        </p:nvSpPr>
-        <p:spPr>
-          <a:xfrm>
-            <a:off x="768096" y="3429000"/>
-            <a:ext cx="100584" cy="100584"/>
-          </a:xfrm>
-          <a:prstGeom prst="ellipse">
-            <a:avLst/>
-          </a:prstGeom>
-          <a:solidFill>
-            <a:srgbClr val="00A896"/>
-          </a:solidFill>
-          <a:ln/>
-        </p:spPr>
-      </p:sp>
-      <p:sp>
-        <p:nvSpPr>
-          <p:cNvPr id="19" name="Text 17"/>
-          <p:cNvSpPr/>
-          <p:nvPr/>
-        </p:nvSpPr>
-        <p:spPr>
-          <a:xfrm>
-            <a:off x="987552" y="3355848"/>
-            <a:ext cx="2898648" cy="292608"/>
-          </a:xfrm>
-          <a:prstGeom prst="rect">
-            <a:avLst/>
-          </a:prstGeom>
-          <a:noFill/>
-          <a:ln/>
-        </p:spPr>
-        <p:txBody>
-          <a:bodyPr wrap="square" lIns="0" tIns="0" rIns="0" bIns="0" rtlCol="0" anchor="ctr"/>
-          <a:lstStyle/>
-          <a:p>
-            <a:pPr marL="0" indent="0">
-              <a:buNone/>
-            </a:pPr>
-            <a:r>
-              <a:rPr lang="en-US" sz="1250" b="1" dirty="0">
-                <a:solidFill>
-                  <a:srgbClr val="1E2761"/>
-                </a:solidFill>
-                <a:latin typeface="Calibri" pitchFamily="34" charset="0"/>
-                <a:ea typeface="Calibri" pitchFamily="34" charset="-122"/>
-                <a:cs typeface="Calibri" pitchFamily="34" charset="-120"/>
-              </a:rPr>
-              <a:t>Backend API</a:t>
-            </a:r>
-            <a:endParaRPr lang="en-US" sz="1250" dirty="0"/>
-          </a:p>
-        </p:txBody>
-      </p:sp>
-      <p:sp>
-        <p:nvSpPr>
-          <p:cNvPr id="20" name="Text 18"/>
-          <p:cNvSpPr/>
-          <p:nvPr/>
-        </p:nvSpPr>
-        <p:spPr>
-          <a:xfrm>
-            <a:off x="768096" y="3685032"/>
-            <a:ext cx="3127248" cy="576072"/>
-          </a:xfrm>
-          <a:prstGeom prst="rect">
-            <a:avLst/>
-          </a:prstGeom>
-          <a:noFill/>
-          <a:ln/>
-        </p:spPr>
-        <p:txBody>
-          <a:bodyPr wrap="square" lIns="0" tIns="0" rIns="0" bIns="0" rtlCol="0" anchor="t"/>
-          <a:lstStyle/>
-          <a:p>
-            <a:pPr marL="0" indent="0">
-              <a:lnSpc>
-                <a:spcPct val="120000"/>
-              </a:lnSpc>
-              <a:buNone/>
-            </a:pPr>
-            <a:r>
-              <a:rPr lang="en-US" sz="1020" dirty="0">
-                <a:solidFill>
-                  <a:srgbClr val="1B2340"/>
-                </a:solidFill>
-                <a:latin typeface="Calibri" pitchFamily="34" charset="0"/>
-                <a:ea typeface="Calibri" pitchFamily="34" charset="-122"/>
-                <a:cs typeface="Calibri" pitchFamily="34" charset="-120"/>
-              </a:rPr>
-              <a:t>NestJS (Node.js) + TypeScript, OpenAPI/Swagger</a:t>
-            </a:r>
-            <a:endParaRPr lang="en-US" sz="1020" dirty="0"/>
-          </a:p>
-        </p:txBody>
-      </p:sp>
-      <p:sp>
-        <p:nvSpPr>
-          <p:cNvPr id="21" name="Shape 19"/>
-          <p:cNvSpPr/>
-          <p:nvPr/>
-        </p:nvSpPr>
-        <p:spPr>
-          <a:xfrm>
-            <a:off x="4343400" y="3264408"/>
-            <a:ext cx="3538728" cy="1078992"/>
-          </a:xfrm>
-          <a:prstGeom prst="rect">
-            <a:avLst/>
-          </a:prstGeom>
-          <a:solidFill>
-            <a:srgbClr val="F3F6FC"/>
-          </a:solidFill>
-          <a:ln w="12700">
-            <a:solidFill>
-              <a:srgbClr val="DCE3F2"/>
-            </a:solidFill>
-            <a:prstDash val="solid"/>
-          </a:ln>
-        </p:spPr>
-      </p:sp>
-      <p:sp>
-        <p:nvSpPr>
-          <p:cNvPr id="22" name="Shape 20"/>
-          <p:cNvSpPr/>
-          <p:nvPr/>
-        </p:nvSpPr>
-        <p:spPr>
-          <a:xfrm>
-            <a:off x="4562856" y="3429000"/>
-            <a:ext cx="100584" cy="100584"/>
-          </a:xfrm>
-          <a:prstGeom prst="ellipse">
-            <a:avLst/>
-          </a:prstGeom>
-          <a:solidFill>
-            <a:srgbClr val="00A896"/>
-          </a:solidFill>
-          <a:ln/>
-        </p:spPr>
-      </p:sp>
-      <p:sp>
-        <p:nvSpPr>
-          <p:cNvPr id="23" name="Text 21"/>
-          <p:cNvSpPr/>
-          <p:nvPr/>
-        </p:nvSpPr>
-        <p:spPr>
-          <a:xfrm>
-            <a:off x="4782312" y="3355848"/>
-            <a:ext cx="2898648" cy="292608"/>
-          </a:xfrm>
-          <a:prstGeom prst="rect">
-            <a:avLst/>
-          </a:prstGeom>
-          <a:noFill/>
-          <a:ln/>
-        </p:spPr>
-        <p:txBody>
-          <a:bodyPr wrap="square" lIns="0" tIns="0" rIns="0" bIns="0" rtlCol="0" anchor="ctr"/>
-          <a:lstStyle/>
-          <a:p>
-            <a:pPr marL="0" indent="0">
-              <a:buNone/>
-            </a:pPr>
-            <a:r>
-              <a:rPr lang="en-US" sz="1250" b="1" dirty="0">
-                <a:solidFill>
-                  <a:srgbClr val="1E2761"/>
-                </a:solidFill>
-                <a:latin typeface="Calibri" pitchFamily="34" charset="0"/>
-                <a:ea typeface="Calibri" pitchFamily="34" charset="-122"/>
-                <a:cs typeface="Calibri" pitchFamily="34" charset="-120"/>
-              </a:rPr>
-              <a:t>Quant Microservice</a:t>
-            </a:r>
-            <a:endParaRPr lang="en-US" sz="1250" dirty="0"/>
-          </a:p>
-        </p:txBody>
-      </p:sp>
-      <p:sp>
-        <p:nvSpPr>
-          <p:cNvPr id="24" name="Text 22"/>
-          <p:cNvSpPr/>
-          <p:nvPr/>
-        </p:nvSpPr>
-        <p:spPr>
-          <a:xfrm>
-            <a:off x="4562856" y="3685032"/>
-            <a:ext cx="3127248" cy="576072"/>
-          </a:xfrm>
-          <a:prstGeom prst="rect">
-            <a:avLst/>
-          </a:prstGeom>
-          <a:noFill/>
-          <a:ln/>
-        </p:spPr>
-        <p:txBody>
-          <a:bodyPr wrap="square" lIns="0" tIns="0" rIns="0" bIns="0" rtlCol="0" anchor="t"/>
-          <a:lstStyle/>
-          <a:p>
-            <a:pPr marL="0" indent="0">
-              <a:lnSpc>
-                <a:spcPct val="120000"/>
-              </a:lnSpc>
-              <a:buNone/>
-            </a:pPr>
-            <a:r>
-              <a:rPr lang="en-US" sz="1020" dirty="0">
-                <a:solidFill>
-                  <a:srgbClr val="1B2340"/>
-                </a:solidFill>
-                <a:latin typeface="Calibri" pitchFamily="34" charset="0"/>
-                <a:ea typeface="Calibri" pitchFamily="34" charset="-122"/>
-                <a:cs typeface="Calibri" pitchFamily="34" charset="-120"/>
-              </a:rPr>
-              <a:t>Python 3.11, FastAPI, NumPy, pandas, SciPy</a:t>
-            </a:r>
-            <a:endParaRPr lang="en-US" sz="1020" dirty="0"/>
-          </a:p>
-        </p:txBody>
-      </p:sp>
-      <p:sp>
-        <p:nvSpPr>
-          <p:cNvPr id="25" name="Shape 23"/>
-          <p:cNvSpPr/>
-          <p:nvPr/>
-        </p:nvSpPr>
-        <p:spPr>
-          <a:xfrm>
-            <a:off x="8138160" y="3264408"/>
-            <a:ext cx="3538728" cy="1078992"/>
-          </a:xfrm>
-          <a:prstGeom prst="rect">
-            <a:avLst/>
-          </a:prstGeom>
-          <a:solidFill>
-            <a:srgbClr val="F3F6FC"/>
-          </a:solidFill>
-          <a:ln w="12700">
-            <a:solidFill>
-              <a:srgbClr val="DCE3F2"/>
-            </a:solidFill>
-            <a:prstDash val="solid"/>
-          </a:ln>
-        </p:spPr>
-      </p:sp>
-      <p:sp>
-        <p:nvSpPr>
-          <p:cNvPr id="26" name="Shape 24"/>
-          <p:cNvSpPr/>
-          <p:nvPr/>
-        </p:nvSpPr>
-        <p:spPr>
-          <a:xfrm>
-            <a:off x="8357616" y="3429000"/>
-            <a:ext cx="100584" cy="100584"/>
-          </a:xfrm>
-          <a:prstGeom prst="ellipse">
-            <a:avLst/>
-          </a:prstGeom>
-          <a:solidFill>
-            <a:srgbClr val="00A896"/>
-          </a:solidFill>
-          <a:ln/>
-        </p:spPr>
-      </p:sp>
-      <p:sp>
-        <p:nvSpPr>
-          <p:cNvPr id="27" name="Text 25"/>
-          <p:cNvSpPr/>
-          <p:nvPr/>
-        </p:nvSpPr>
-        <p:spPr>
-          <a:xfrm>
-            <a:off x="8577072" y="3355848"/>
-            <a:ext cx="2898648" cy="292608"/>
-          </a:xfrm>
-          <a:prstGeom prst="rect">
-            <a:avLst/>
-          </a:prstGeom>
-          <a:noFill/>
-          <a:ln/>
-        </p:spPr>
-        <p:txBody>
-          <a:bodyPr wrap="square" lIns="0" tIns="0" rIns="0" bIns="0" rtlCol="0" anchor="ctr"/>
-          <a:lstStyle/>
-          <a:p>
-            <a:pPr marL="0" indent="0">
-              <a:buNone/>
-            </a:pPr>
-            <a:r>
-              <a:rPr lang="en-US" sz="1250" b="1" dirty="0">
-                <a:solidFill>
-                  <a:srgbClr val="1E2761"/>
-                </a:solidFill>
-                <a:latin typeface="Calibri" pitchFamily="34" charset="0"/>
-                <a:ea typeface="Calibri" pitchFamily="34" charset="-122"/>
-                <a:cs typeface="Calibri" pitchFamily="34" charset="-120"/>
-              </a:rPr>
-              <a:t>Database &amp; ORM</a:t>
-            </a:r>
-            <a:endParaRPr lang="en-US" sz="1250" dirty="0"/>
-          </a:p>
-        </p:txBody>
-      </p:sp>
-      <p:sp>
-        <p:nvSpPr>
-          <p:cNvPr id="28" name="Text 26"/>
-          <p:cNvSpPr/>
-          <p:nvPr/>
-        </p:nvSpPr>
-        <p:spPr>
-          <a:xfrm>
-            <a:off x="8357616" y="3685032"/>
-            <a:ext cx="3127248" cy="576072"/>
-          </a:xfrm>
-          <a:prstGeom prst="rect">
-            <a:avLst/>
-          </a:prstGeom>
-          <a:noFill/>
-          <a:ln/>
-        </p:spPr>
-        <p:txBody>
-          <a:bodyPr wrap="square" lIns="0" tIns="0" rIns="0" bIns="0" rtlCol="0" anchor="t"/>
-          <a:lstStyle/>
-          <a:p>
-            <a:pPr marL="0" indent="0">
-              <a:lnSpc>
-                <a:spcPct val="120000"/>
-              </a:lnSpc>
-              <a:buNone/>
-            </a:pPr>
-            <a:r>
-              <a:rPr lang="en-US" sz="1020" dirty="0">
-                <a:solidFill>
-                  <a:srgbClr val="1B2340"/>
-                </a:solidFill>
-                <a:latin typeface="Calibri" pitchFamily="34" charset="0"/>
-                <a:ea typeface="Calibri" pitchFamily="34" charset="-122"/>
-                <a:cs typeface="Calibri" pitchFamily="34" charset="-120"/>
-              </a:rPr>
-              <a:t>PostgreSQL 16 + Prisma (Decimal precision)</a:t>
-            </a:r>
-            <a:endParaRPr lang="en-US" sz="1020" dirty="0"/>
-          </a:p>
-        </p:txBody>
-      </p:sp>
-      <p:sp>
-        <p:nvSpPr>
-          <p:cNvPr id="29" name="Shape 27"/>
-          <p:cNvSpPr/>
-          <p:nvPr/>
-        </p:nvSpPr>
-        <p:spPr>
-          <a:xfrm>
-            <a:off x="548640" y="4562856"/>
-            <a:ext cx="3538728" cy="1078992"/>
-          </a:xfrm>
-          <a:prstGeom prst="rect">
-            <a:avLst/>
-          </a:prstGeom>
-          <a:solidFill>
-            <a:srgbClr val="F3F6FC"/>
-          </a:solidFill>
-          <a:ln w="12700">
-            <a:solidFill>
-              <a:srgbClr val="DCE3F2"/>
-            </a:solidFill>
-            <a:prstDash val="solid"/>
-          </a:ln>
-        </p:spPr>
-      </p:sp>
-      <p:sp>
-        <p:nvSpPr>
-          <p:cNvPr id="30" name="Shape 28"/>
-          <p:cNvSpPr/>
-          <p:nvPr/>
-        </p:nvSpPr>
-        <p:spPr>
-          <a:xfrm>
-            <a:off x="768096" y="4727448"/>
-            <a:ext cx="100584" cy="100584"/>
-          </a:xfrm>
-          <a:prstGeom prst="ellipse">
-            <a:avLst/>
-          </a:prstGeom>
-          <a:solidFill>
-            <a:srgbClr val="00A896"/>
-          </a:solidFill>
-          <a:ln/>
-        </p:spPr>
-      </p:sp>
-      <p:sp>
-        <p:nvSpPr>
-          <p:cNvPr id="31" name="Text 29"/>
-          <p:cNvSpPr/>
-          <p:nvPr/>
-        </p:nvSpPr>
-        <p:spPr>
-          <a:xfrm>
-            <a:off x="987552" y="4654296"/>
-            <a:ext cx="2898648" cy="292608"/>
-          </a:xfrm>
-          <a:prstGeom prst="rect">
-            <a:avLst/>
-          </a:prstGeom>
-          <a:noFill/>
-          <a:ln/>
-        </p:spPr>
-        <p:txBody>
-          <a:bodyPr wrap="square" lIns="0" tIns="0" rIns="0" bIns="0" rtlCol="0" anchor="ctr"/>
-          <a:lstStyle/>
-          <a:p>
-            <a:pPr marL="0" indent="0">
-              <a:buNone/>
-            </a:pPr>
-            <a:r>
-              <a:rPr lang="en-US" sz="1250" b="1" dirty="0">
-                <a:solidFill>
-                  <a:srgbClr val="1E2761"/>
-                </a:solidFill>
-                <a:latin typeface="Calibri" pitchFamily="34" charset="0"/>
-                <a:ea typeface="Calibri" pitchFamily="34" charset="-122"/>
-                <a:cs typeface="Calibri" pitchFamily="34" charset="-120"/>
-              </a:rPr>
-              <a:t>Cache &amp; Queues</a:t>
-            </a:r>
-            <a:endParaRPr lang="en-US" sz="1250" dirty="0"/>
-          </a:p>
-        </p:txBody>
-      </p:sp>
-      <p:sp>
-        <p:nvSpPr>
-          <p:cNvPr id="32" name="Text 30"/>
-          <p:cNvSpPr/>
-          <p:nvPr/>
-        </p:nvSpPr>
-        <p:spPr>
-          <a:xfrm>
-            <a:off x="768096" y="4983480"/>
-            <a:ext cx="3127248" cy="576072"/>
-          </a:xfrm>
-          <a:prstGeom prst="rect">
-            <a:avLst/>
-          </a:prstGeom>
-          <a:noFill/>
-          <a:ln/>
-        </p:spPr>
-        <p:txBody>
-          <a:bodyPr wrap="square" lIns="0" tIns="0" rIns="0" bIns="0" rtlCol="0" anchor="t"/>
-          <a:lstStyle/>
-          <a:p>
-            <a:pPr marL="0" indent="0">
-              <a:lnSpc>
-                <a:spcPct val="120000"/>
-              </a:lnSpc>
-              <a:buNone/>
-            </a:pPr>
-            <a:r>
-              <a:rPr lang="en-US" sz="1020" dirty="0">
-                <a:solidFill>
-                  <a:srgbClr val="1B2340"/>
-                </a:solidFill>
-                <a:latin typeface="Calibri" pitchFamily="34" charset="0"/>
-                <a:ea typeface="Calibri" pitchFamily="34" charset="-122"/>
-                <a:cs typeface="Calibri" pitchFamily="34" charset="-120"/>
-              </a:rPr>
-              <a:t>Redis 7 + BullMQ (async jobs, price cache)</a:t>
-            </a:r>
-            <a:endParaRPr lang="en-US" sz="1020" dirty="0"/>
-          </a:p>
-        </p:txBody>
-      </p:sp>
-      <p:sp>
-        <p:nvSpPr>
-          <p:cNvPr id="33" name="Shape 31"/>
-          <p:cNvSpPr/>
-          <p:nvPr/>
-        </p:nvSpPr>
-        <p:spPr>
-          <a:xfrm>
-            <a:off x="4343400" y="4562856"/>
-            <a:ext cx="3538728" cy="1078992"/>
-          </a:xfrm>
-          <a:prstGeom prst="rect">
-            <a:avLst/>
-          </a:prstGeom>
-          <a:solidFill>
-            <a:srgbClr val="F3F6FC"/>
-          </a:solidFill>
-          <a:ln w="12700">
-            <a:solidFill>
-              <a:srgbClr val="DCE3F2"/>
-            </a:solidFill>
-            <a:prstDash val="solid"/>
-          </a:ln>
-        </p:spPr>
-      </p:sp>
-      <p:sp>
-        <p:nvSpPr>
-          <p:cNvPr id="34" name="Shape 32"/>
-          <p:cNvSpPr/>
-          <p:nvPr/>
-        </p:nvSpPr>
-        <p:spPr>
-          <a:xfrm>
-            <a:off x="4562856" y="4727448"/>
-            <a:ext cx="100584" cy="100584"/>
-          </a:xfrm>
-          <a:prstGeom prst="ellipse">
-            <a:avLst/>
-          </a:prstGeom>
-          <a:solidFill>
-            <a:srgbClr val="00A896"/>
-          </a:solidFill>
-          <a:ln/>
-        </p:spPr>
-      </p:sp>
-      <p:sp>
-        <p:nvSpPr>
-          <p:cNvPr id="35" name="Text 33"/>
-          <p:cNvSpPr/>
-          <p:nvPr/>
-        </p:nvSpPr>
-        <p:spPr>
-          <a:xfrm>
-            <a:off x="4782312" y="4654296"/>
-            <a:ext cx="2898648" cy="292608"/>
-          </a:xfrm>
-          <a:prstGeom prst="rect">
-            <a:avLst/>
-          </a:prstGeom>
-          <a:noFill/>
-          <a:ln/>
-        </p:spPr>
-        <p:txBody>
-          <a:bodyPr wrap="square" lIns="0" tIns="0" rIns="0" bIns="0" rtlCol="0" anchor="ctr"/>
-          <a:lstStyle/>
-          <a:p>
-            <a:pPr marL="0" indent="0">
-              <a:buNone/>
-            </a:pPr>
-            <a:r>
-              <a:rPr lang="en-US" sz="1250" b="1" dirty="0">
-                <a:solidFill>
-                  <a:srgbClr val="1E2761"/>
-                </a:solidFill>
-                <a:latin typeface="Calibri" pitchFamily="34" charset="0"/>
-                <a:ea typeface="Calibri" pitchFamily="34" charset="-122"/>
-                <a:cs typeface="Calibri" pitchFamily="34" charset="-120"/>
-              </a:rPr>
-              <a:t>Data Visualization</a:t>
-            </a:r>
-            <a:endParaRPr lang="en-US" sz="1250" dirty="0"/>
-          </a:p>
-        </p:txBody>
-      </p:sp>
-      <p:sp>
-        <p:nvSpPr>
-          <p:cNvPr id="36" name="Text 34"/>
-          <p:cNvSpPr/>
-          <p:nvPr/>
-        </p:nvSpPr>
-        <p:spPr>
-          <a:xfrm>
-            <a:off x="4562856" y="4983480"/>
-            <a:ext cx="3127248" cy="576072"/>
-          </a:xfrm>
-          <a:prstGeom prst="rect">
-            <a:avLst/>
-          </a:prstGeom>
-          <a:noFill/>
-          <a:ln/>
-        </p:spPr>
-        <p:txBody>
-          <a:bodyPr wrap="square" lIns="0" tIns="0" rIns="0" bIns="0" rtlCol="0" anchor="t"/>
-          <a:lstStyle/>
-          <a:p>
-            <a:pPr marL="0" indent="0">
-              <a:lnSpc>
-                <a:spcPct val="120000"/>
-              </a:lnSpc>
-              <a:buNone/>
-            </a:pPr>
-            <a:r>
-              <a:rPr lang="en-US" sz="1020" dirty="0">
-                <a:solidFill>
-                  <a:srgbClr val="1B2340"/>
-                </a:solidFill>
-                <a:latin typeface="Calibri" pitchFamily="34" charset="0"/>
-                <a:ea typeface="Calibri" pitchFamily="34" charset="-122"/>
-                <a:cs typeface="Calibri" pitchFamily="34" charset="-120"/>
-              </a:rPr>
-              <a:t>Recharts + Apache ECharts</a:t>
-            </a:r>
-            <a:endParaRPr lang="en-US" sz="1020" dirty="0"/>
-          </a:p>
-        </p:txBody>
-      </p:sp>
-      <p:sp>
-        <p:nvSpPr>
-          <p:cNvPr id="37" name="Shape 35"/>
-          <p:cNvSpPr/>
-          <p:nvPr/>
-        </p:nvSpPr>
-        <p:spPr>
-          <a:xfrm>
-            <a:off x="8138160" y="4562856"/>
-            <a:ext cx="3538728" cy="1078992"/>
-          </a:xfrm>
-          <a:prstGeom prst="rect">
-            <a:avLst/>
-          </a:prstGeom>
-          <a:solidFill>
-            <a:srgbClr val="F3F6FC"/>
-          </a:solidFill>
-          <a:ln w="12700">
-            <a:solidFill>
-              <a:srgbClr val="DCE3F2"/>
-            </a:solidFill>
-            <a:prstDash val="solid"/>
-          </a:ln>
-        </p:spPr>
-      </p:sp>
-      <p:sp>
-        <p:nvSpPr>
-          <p:cNvPr id="38" name="Shape 36"/>
-          <p:cNvSpPr/>
-          <p:nvPr/>
-        </p:nvSpPr>
-        <p:spPr>
-          <a:xfrm>
-            <a:off x="8357616" y="4727448"/>
-            <a:ext cx="100584" cy="100584"/>
-          </a:xfrm>
-          <a:prstGeom prst="ellipse">
-            <a:avLst/>
-          </a:prstGeom>
-          <a:solidFill>
-            <a:srgbClr val="00A896"/>
-          </a:solidFill>
-          <a:ln/>
-        </p:spPr>
-      </p:sp>
-      <p:sp>
-        <p:nvSpPr>
-          <p:cNvPr id="39" name="Text 37"/>
-          <p:cNvSpPr/>
-          <p:nvPr/>
-        </p:nvSpPr>
-        <p:spPr>
-          <a:xfrm>
-            <a:off x="8577072" y="4654296"/>
-            <a:ext cx="2898648" cy="292608"/>
-          </a:xfrm>
-          <a:prstGeom prst="rect">
-            <a:avLst/>
-          </a:prstGeom>
-          <a:noFill/>
-          <a:ln/>
-        </p:spPr>
-        <p:txBody>
-          <a:bodyPr wrap="square" lIns="0" tIns="0" rIns="0" bIns="0" rtlCol="0" anchor="ctr"/>
-          <a:lstStyle/>
-          <a:p>
-            <a:pPr marL="0" indent="0">
-              <a:buNone/>
-            </a:pPr>
-            <a:r>
-              <a:rPr lang="en-US" sz="1250" b="1" dirty="0">
-                <a:solidFill>
-                  <a:srgbClr val="1E2761"/>
-                </a:solidFill>
-                <a:latin typeface="Calibri" pitchFamily="34" charset="0"/>
-                <a:ea typeface="Calibri" pitchFamily="34" charset="-122"/>
-                <a:cs typeface="Calibri" pitchFamily="34" charset="-120"/>
-              </a:rPr>
-              <a:t>DevOps &amp; Cloud</a:t>
-            </a:r>
-            <a:endParaRPr lang="en-US" sz="1250" dirty="0"/>
-          </a:p>
-        </p:txBody>
-      </p:sp>
-      <p:sp>
-        <p:nvSpPr>
-          <p:cNvPr id="40" name="Text 38"/>
-          <p:cNvSpPr/>
-          <p:nvPr/>
-        </p:nvSpPr>
-        <p:spPr>
-          <a:xfrm>
-            <a:off x="8357616" y="4983480"/>
-            <a:ext cx="3127248" cy="576072"/>
-          </a:xfrm>
-          <a:prstGeom prst="rect">
-            <a:avLst/>
-          </a:prstGeom>
-          <a:noFill/>
-          <a:ln/>
-        </p:spPr>
-        <p:txBody>
-          <a:bodyPr wrap="square" lIns="0" tIns="0" rIns="0" bIns="0" rtlCol="0" anchor="t"/>
-          <a:lstStyle/>
-          <a:p>
-            <a:pPr marL="0" indent="0">
-              <a:lnSpc>
-                <a:spcPct val="120000"/>
-              </a:lnSpc>
-              <a:buNone/>
-            </a:pPr>
-            <a:r>
-              <a:rPr lang="en-US" sz="1020" dirty="0">
-                <a:solidFill>
-                  <a:srgbClr val="1B2340"/>
-                </a:solidFill>
-                <a:latin typeface="Calibri" pitchFamily="34" charset="0"/>
-                <a:ea typeface="Calibri" pitchFamily="34" charset="-122"/>
-                <a:cs typeface="Calibri" pitchFamily="34" charset="-120"/>
-              </a:rPr>
-              <a:t>Docker, GitHub Actions, AWS ECS/RDS (ap-south-1 Mumbai)</a:t>
-            </a:r>
-            <a:endParaRPr lang="en-US" sz="1020" dirty="0"/>
-          </a:p>
-        </p:txBody>
-      </p:sp>
-      <p:sp>
-        <p:nvSpPr>
-          <p:cNvPr id="41" name="Text 39"/>
-          <p:cNvSpPr/>
-          <p:nvPr/>
-        </p:nvSpPr>
-        <p:spPr>
-          <a:xfrm>
-            <a:off x="457200" y="6473952"/>
-            <a:ext cx="7315200" cy="274320"/>
-          </a:xfrm>
-          <a:prstGeom prst="rect">
-            <a:avLst/>
-          </a:prstGeom>
-          <a:noFill/>
-          <a:ln/>
-        </p:spPr>
-        <p:txBody>
-          <a:bodyPr wrap="square" lIns="0" tIns="0" rIns="0" bIns="0" rtlCol="0" anchor="ctr"/>
-          <a:lstStyle/>
-          <a:p>
-            <a:pPr marL="0" indent="0">
-              <a:buNone/>
-            </a:pPr>
-            <a:r>
-              <a:rPr lang="en-US" sz="950" dirty="0">
-                <a:solidFill>
-                  <a:srgbClr val="5B6478"/>
-                </a:solidFill>
-                <a:latin typeface="Calibri" pitchFamily="34" charset="0"/>
-                <a:ea typeface="Calibri" pitchFamily="34" charset="-122"/>
-                <a:cs typeface="Calibri" pitchFamily="34" charset="-120"/>
-              </a:rPr>
-              <a:t>Wealth Compass · NSIQ Infotech</a:t>
-            </a:r>
-            <a:endParaRPr lang="en-US" sz="950" dirty="0"/>
-          </a:p>
-        </p:txBody>
-      </p:sp>
-      <p:sp>
-        <p:nvSpPr>
-          <p:cNvPr id="42" name="Text 40"/>
-          <p:cNvSpPr/>
-          <p:nvPr/>
-        </p:nvSpPr>
-        <p:spPr>
-          <a:xfrm>
-            <a:off x="11368735" y="6473952"/>
-            <a:ext cx="457200" cy="274320"/>
-          </a:xfrm>
-          <a:prstGeom prst="rect">
-            <a:avLst/>
-          </a:prstGeom>
-          <a:noFill/>
-          <a:ln/>
-        </p:spPr>
-        <p:txBody>
-          <a:bodyPr wrap="square" lIns="0" tIns="0" rIns="0" bIns="0" rtlCol="0" anchor="ctr"/>
-          <a:lstStyle/>
-          <a:p>
-            <a:pPr marL="0" indent="0" algn="r">
-              <a:buNone/>
-            </a:pPr>
-            <a:r>
-              <a:rPr lang="en-US" sz="950" dirty="0">
-                <a:solidFill>
-                  <a:srgbClr val="5B6478"/>
-                </a:solidFill>
-                <a:latin typeface="Calibri" pitchFamily="34" charset="0"/>
-                <a:ea typeface="Calibri" pitchFamily="34" charset="-122"/>
-                <a:cs typeface="Calibri" pitchFamily="34" charset="-120"/>
-              </a:rPr>
-              <a:t>6</a:t>
-            </a:r>
-            <a:endParaRPr lang="en-US" sz="950" dirty="0"/>
           </a:p>
         </p:txBody>
       </p:sp>
